--- a/Документация/Седых Владислав БД-22-1.pptx
+++ b/Документация/Седых Владислав БД-22-1.pptx
@@ -206,7 +206,7 @@
           <a:p>
             <a:fld id="{94389266-1B27-4525-B165-AD1A73342BE1}" type="datetimeFigureOut">
               <a:rPr lang="en-US" smtClean="0"/>
-              <a:t>6/1/2026</a:t>
+              <a:t>6/2/2026</a:t>
             </a:fld>
             <a:endParaRPr lang="en-US"/>
           </a:p>
@@ -2438,7 +2438,7 @@
           <a:p>
             <a:fld id="{DEA76DA3-B598-4B8A-8255-3391DDF783A7}" type="datetimeFigureOut">
               <a:rPr lang="ru-RU" smtClean="0"/>
-              <a:t>01.06.2026</a:t>
+              <a:t>02.06.2026</a:t>
             </a:fld>
             <a:endParaRPr lang="ru-RU"/>
           </a:p>
@@ -2636,7 +2636,7 @@
           <a:p>
             <a:fld id="{DEA76DA3-B598-4B8A-8255-3391DDF783A7}" type="datetimeFigureOut">
               <a:rPr lang="ru-RU" smtClean="0"/>
-              <a:t>01.06.2026</a:t>
+              <a:t>02.06.2026</a:t>
             </a:fld>
             <a:endParaRPr lang="ru-RU"/>
           </a:p>
@@ -2844,7 +2844,7 @@
           <a:p>
             <a:fld id="{DEA76DA3-B598-4B8A-8255-3391DDF783A7}" type="datetimeFigureOut">
               <a:rPr lang="ru-RU" smtClean="0"/>
-              <a:t>01.06.2026</a:t>
+              <a:t>02.06.2026</a:t>
             </a:fld>
             <a:endParaRPr lang="ru-RU"/>
           </a:p>
@@ -2951,7 +2951,7 @@
           <a:p>
             <a:fld id="{F93A723B-5719-4EEA-B777-EAF3DA7FDF21}" type="datetimeFigureOut">
               <a:rPr lang="ru-RU" smtClean="0"/>
-              <a:t>01.06.2026</a:t>
+              <a:t>02.06.2026</a:t>
             </a:fld>
             <a:endParaRPr lang="ru-RU"/>
           </a:p>
@@ -3217,7 +3217,7 @@
           <a:p>
             <a:fld id="{DEA76DA3-B598-4B8A-8255-3391DDF783A7}" type="datetimeFigureOut">
               <a:rPr lang="ru-RU" smtClean="0"/>
-              <a:t>01.06.2026</a:t>
+              <a:t>02.06.2026</a:t>
             </a:fld>
             <a:endParaRPr lang="ru-RU"/>
           </a:p>
@@ -3492,7 +3492,7 @@
           <a:p>
             <a:fld id="{DEA76DA3-B598-4B8A-8255-3391DDF783A7}" type="datetimeFigureOut">
               <a:rPr lang="ru-RU" smtClean="0"/>
-              <a:t>01.06.2026</a:t>
+              <a:t>02.06.2026</a:t>
             </a:fld>
             <a:endParaRPr lang="ru-RU"/>
           </a:p>
@@ -3757,7 +3757,7 @@
           <a:p>
             <a:fld id="{DEA76DA3-B598-4B8A-8255-3391DDF783A7}" type="datetimeFigureOut">
               <a:rPr lang="ru-RU" smtClean="0"/>
-              <a:t>01.06.2026</a:t>
+              <a:t>02.06.2026</a:t>
             </a:fld>
             <a:endParaRPr lang="ru-RU"/>
           </a:p>
@@ -4169,7 +4169,7 @@
           <a:p>
             <a:fld id="{DEA76DA3-B598-4B8A-8255-3391DDF783A7}" type="datetimeFigureOut">
               <a:rPr lang="ru-RU" smtClean="0"/>
-              <a:t>01.06.2026</a:t>
+              <a:t>02.06.2026</a:t>
             </a:fld>
             <a:endParaRPr lang="ru-RU"/>
           </a:p>
@@ -4310,7 +4310,7 @@
           <a:p>
             <a:fld id="{DEA76DA3-B598-4B8A-8255-3391DDF783A7}" type="datetimeFigureOut">
               <a:rPr lang="ru-RU" smtClean="0"/>
-              <a:t>01.06.2026</a:t>
+              <a:t>02.06.2026</a:t>
             </a:fld>
             <a:endParaRPr lang="ru-RU"/>
           </a:p>
@@ -4423,7 +4423,7 @@
           <a:p>
             <a:fld id="{DEA76DA3-B598-4B8A-8255-3391DDF783A7}" type="datetimeFigureOut">
               <a:rPr lang="ru-RU" smtClean="0"/>
-              <a:t>01.06.2026</a:t>
+              <a:t>02.06.2026</a:t>
             </a:fld>
             <a:endParaRPr lang="ru-RU"/>
           </a:p>
@@ -4734,7 +4734,7 @@
           <a:p>
             <a:fld id="{DEA76DA3-B598-4B8A-8255-3391DDF783A7}" type="datetimeFigureOut">
               <a:rPr lang="ru-RU" smtClean="0"/>
-              <a:t>01.06.2026</a:t>
+              <a:t>02.06.2026</a:t>
             </a:fld>
             <a:endParaRPr lang="ru-RU"/>
           </a:p>
@@ -5022,7 +5022,7 @@
           <a:p>
             <a:fld id="{DEA76DA3-B598-4B8A-8255-3391DDF783A7}" type="datetimeFigureOut">
               <a:rPr lang="ru-RU" smtClean="0"/>
-              <a:t>01.06.2026</a:t>
+              <a:t>02.06.2026</a:t>
             </a:fld>
             <a:endParaRPr lang="ru-RU"/>
           </a:p>
@@ -5263,7 +5263,7 @@
           <a:p>
             <a:fld id="{DEA76DA3-B598-4B8A-8255-3391DDF783A7}" type="datetimeFigureOut">
               <a:rPr lang="ru-RU" smtClean="0"/>
-              <a:t>01.06.2026</a:t>
+              <a:t>02.06.2026</a:t>
             </a:fld>
             <a:endParaRPr lang="ru-RU"/>
           </a:p>
@@ -6089,8 +6089,8 @@
         </p:nvSpPr>
         <p:spPr>
           <a:xfrm>
-            <a:off x="4110267" y="81542"/>
-            <a:ext cx="3643659" cy="1143000"/>
+            <a:off x="4137808" y="0"/>
+            <a:ext cx="3643659" cy="699715"/>
           </a:xfrm>
         </p:spPr>
         <p:txBody>
@@ -6172,11 +6172,17 @@
           <p:cNvGraphicFramePr>
             <a:graphicFrameLocks noGrp="1"/>
           </p:cNvGraphicFramePr>
-          <p:nvPr/>
+          <p:nvPr>
+            <p:extLst>
+              <p:ext uri="{D42A27DB-BD31-4B8C-83A1-F6EECF244321}">
+                <p14:modId xmlns:p14="http://schemas.microsoft.com/office/powerpoint/2010/main" val="1929535835"/>
+              </p:ext>
+            </p:extLst>
+          </p:nvPr>
         </p:nvGraphicFramePr>
         <p:xfrm>
           <a:off x="351692" y="1005840"/>
-          <a:ext cx="11215893" cy="5242560"/>
+          <a:ext cx="11215893" cy="3241040"/>
         </p:xfrm>
         <a:graphic>
           <a:graphicData uri="http://schemas.openxmlformats.org/drawingml/2006/table">
@@ -6208,9 +6214,9 @@
                     <a:p>
                       <a:pPr algn="ctr"/>
                       <a:r>
-                        <a:rPr lang="ru-RU" sz="1400" dirty="0">
-                          <a:latin typeface="Arial" panose="020B0604020202020204" pitchFamily="34" charset="0"/>
-                          <a:cs typeface="Arial" panose="020B0604020202020204" pitchFamily="34" charset="0"/>
+                        <a:rPr lang="ru-RU" sz="1400" b="0" dirty="0">
+                          <a:latin typeface="Times New Roman" panose="02020603050405020304" pitchFamily="18" charset="0"/>
+                          <a:cs typeface="Times New Roman" panose="02020603050405020304" pitchFamily="18" charset="0"/>
                         </a:rPr>
                         <a:t>Виды деятельности:</a:t>
                       </a:r>
@@ -6241,18 +6247,18 @@
                         <a:defRPr/>
                       </a:pPr>
                       <a:r>
-                        <a:rPr lang="ru-RU" sz="1400" b="1" dirty="0">
+                        <a:rPr lang="ru-RU" sz="1400" b="0" dirty="0">
                           <a:solidFill>
                             <a:schemeClr val="bg1"/>
                           </a:solidFill>
                           <a:effectLst/>
-                          <a:latin typeface="Arial" panose="020B0604020202020204" pitchFamily="34" charset="0"/>
+                          <a:latin typeface="Times New Roman" panose="02020603050405020304" pitchFamily="18" charset="0"/>
                           <a:ea typeface="Times New Roman" panose="02020603050405020304" pitchFamily="18" charset="0"/>
-                          <a:cs typeface="Arial" panose="020B0604020202020204" pitchFamily="34" charset="0"/>
+                          <a:cs typeface="Times New Roman" panose="02020603050405020304" pitchFamily="18" charset="0"/>
                         </a:rPr>
                         <a:t>Функциональные задачи программного продукта:</a:t>
                       </a:r>
-                      <a:endParaRPr lang="ru-RU" sz="1400" b="1" dirty="0">
+                      <a:endParaRPr lang="ru-RU" sz="1400" b="0" dirty="0">
                         <a:solidFill>
                           <a:schemeClr val="bg1"/>
                         </a:solidFill>
@@ -6260,16 +6266,9 @@
                         <a:highlight>
                           <a:srgbClr val="FFFF00"/>
                         </a:highlight>
-                        <a:latin typeface="Arial" panose="020B0604020202020204" pitchFamily="34" charset="0"/>
+                        <a:latin typeface="Times New Roman" panose="02020603050405020304" pitchFamily="18" charset="0"/>
                         <a:ea typeface="Times New Roman" panose="02020603050405020304" pitchFamily="18" charset="0"/>
-                        <a:cs typeface="Arial" panose="020B0604020202020204" pitchFamily="34" charset="0"/>
-                      </a:endParaRPr>
-                    </a:p>
-                    <a:p>
-                      <a:pPr algn="ctr"/>
-                      <a:endParaRPr lang="ru-RU" sz="1400" dirty="0">
-                        <a:latin typeface="Arial" panose="020B0604020202020204" pitchFamily="34" charset="0"/>
-                        <a:cs typeface="Arial" panose="020B0604020202020204" pitchFamily="34" charset="0"/>
+                        <a:cs typeface="Times New Roman" panose="02020603050405020304" pitchFamily="18" charset="0"/>
                       </a:endParaRPr>
                     </a:p>
                   </a:txBody>
@@ -6289,50 +6288,24 @@
                     <a:p>
                       <a:pPr marL="0" algn="l" defTabSz="914400" rtl="0" eaLnBrk="1" latinLnBrk="0" hangingPunct="1"/>
                       <a:r>
-                        <a:rPr lang="ru-RU" sz="1400" b="1" kern="1200" dirty="0">
-                          <a:solidFill>
-                            <a:schemeClr val="dk1"/>
-                          </a:solidFill>
-                          <a:latin typeface="Arial" panose="020B0604020202020204" pitchFamily="34" charset="0"/>
-                          <a:ea typeface="+mn-ea"/>
-                          <a:cs typeface="Arial" panose="020B0604020202020204" pitchFamily="34" charset="0"/>
-                        </a:rPr>
-                        <a:t>Вид деятельности (напечатать вид деятельности)</a:t>
-                      </a:r>
-                    </a:p>
-                    <a:p>
-                      <a:pPr marL="361950" indent="0" algn="l" defTabSz="914400" rtl="0" eaLnBrk="1" latinLnBrk="0" hangingPunct="1"/>
-                      <a:r>
-                        <a:rPr lang="ru-RU" sz="1400" kern="1200" dirty="0">
+                        <a:rPr lang="ru-RU" sz="1400" b="0" i="0" kern="1200" dirty="0">
                           <a:solidFill>
                             <a:schemeClr val="dk1"/>
                           </a:solidFill>
                           <a:effectLst/>
-                          <a:latin typeface="+mn-lt"/>
+                          <a:latin typeface="Times New Roman" panose="02020603050405020304" pitchFamily="18" charset="0"/>
                           <a:ea typeface="+mn-ea"/>
-                          <a:cs typeface="+mn-cs"/>
+                          <a:cs typeface="Times New Roman" panose="02020603050405020304" pitchFamily="18" charset="0"/>
                         </a:rPr>
-                        <a:t>текст.</a:t>
+                        <a:t>Проведён анализ предметной области</a:t>
                       </a:r>
-                    </a:p>
-                    <a:p>
-                      <a:pPr marL="361950" indent="0" algn="l" defTabSz="914400" rtl="0" eaLnBrk="1" latinLnBrk="0" hangingPunct="1"/>
-                      <a:r>
-                        <a:rPr lang="ru-RU" sz="1400" b="1" kern="1200" dirty="0">
-                          <a:solidFill>
-                            <a:schemeClr val="dk1"/>
-                          </a:solidFill>
-                          <a:effectLst/>
-                          <a:latin typeface="+mn-lt"/>
-                          <a:ea typeface="+mn-ea"/>
-                          <a:cs typeface="+mn-cs"/>
-                        </a:rPr>
-                        <a:t>…..</a:t>
-                      </a:r>
-                      <a:endParaRPr lang="ru-RU" sz="1400" dirty="0"/>
+                      <a:endParaRPr lang="ru-RU" sz="1400" b="0" dirty="0">
+                        <a:latin typeface="Times New Roman" panose="02020603050405020304" pitchFamily="18" charset="0"/>
+                        <a:cs typeface="Times New Roman" panose="02020603050405020304" pitchFamily="18" charset="0"/>
+                      </a:endParaRPr>
                     </a:p>
                   </a:txBody>
-                  <a:tcPr/>
+                  <a:tcPr anchor="ctr"/>
                 </a:tc>
                 <a:tc>
                   <a:txBody>
@@ -6347,61 +6320,26 @@
                         <a:buNone/>
                       </a:pPr>
                       <a:r>
-                        <a:rPr lang="ru-RU" sz="1400" dirty="0">
+                        <a:rPr lang="ru-RU" sz="1400" b="0" i="0" kern="1200" dirty="0">
+                          <a:solidFill>
+                            <a:schemeClr val="dk1"/>
+                          </a:solidFill>
                           <a:effectLst/>
-                          <a:latin typeface="Arial" panose="020B0604020202020204" pitchFamily="34" charset="0"/>
-                          <a:ea typeface="Times New Roman" panose="02020603050405020304" pitchFamily="18" charset="0"/>
-                          <a:cs typeface="Arial" panose="020B0604020202020204" pitchFamily="34" charset="0"/>
+                          <a:latin typeface="Times New Roman" panose="02020603050405020304" pitchFamily="18" charset="0"/>
+                          <a:ea typeface="+mn-ea"/>
+                          <a:cs typeface="Times New Roman" panose="02020603050405020304" pitchFamily="18" charset="0"/>
                         </a:rPr>
-                        <a:t>Из задания на ДП (перечень что реализовать в программном продукте)</a:t>
+                        <a:t>Определены объекты (Продукт, Норма, Блюдо, Рецепт, Складская операция, Накладная), их атрибуты и связи.</a:t>
                       </a:r>
-                    </a:p>
-                    <a:p>
-                      <a:pPr marL="0" marR="165100" lvl="0" indent="0" algn="just" defTabSz="914400" rtl="0" eaLnBrk="1" fontAlgn="auto" latinLnBrk="0" hangingPunct="1">
-                        <a:lnSpc>
-                          <a:spcPct val="100000"/>
-                        </a:lnSpc>
-                        <a:spcBef>
-                          <a:spcPts val="0"/>
-                        </a:spcBef>
-                        <a:spcAft>
-                          <a:spcPts val="0"/>
-                        </a:spcAft>
-                        <a:buClrTx/>
-                        <a:buSzTx/>
-                        <a:buFont typeface="Symbol" panose="05050102010706020507" pitchFamily="18" charset="2"/>
-                        <a:buNone/>
-                        <a:tabLst/>
-                        <a:defRPr/>
-                      </a:pPr>
-                      <a:r>
-                        <a:rPr lang="ru-RU" sz="1400" dirty="0">
-                          <a:latin typeface="Arial" panose="020B0604020202020204" pitchFamily="34" charset="0"/>
-                          <a:cs typeface="Arial" panose="020B0604020202020204" pitchFamily="34" charset="0"/>
-                        </a:rPr>
-                        <a:t>текст</a:t>
-                      </a:r>
-                    </a:p>
-                    <a:p>
-                      <a:pPr marL="0" marR="165100" lvl="0" indent="0" algn="just">
-                        <a:spcAft>
-                          <a:spcPts val="0"/>
-                        </a:spcAft>
-                        <a:buFont typeface="Symbol" panose="05050102010706020507" pitchFamily="18" charset="2"/>
-                        <a:buNone/>
-                      </a:pPr>
-                      <a:r>
-                        <a:rPr lang="ru-RU" sz="1400" dirty="0">
-                          <a:effectLst/>
-                          <a:latin typeface="Arial" panose="020B0604020202020204" pitchFamily="34" charset="0"/>
-                          <a:ea typeface="Times New Roman" panose="02020603050405020304" pitchFamily="18" charset="0"/>
-                          <a:cs typeface="Arial" panose="020B0604020202020204" pitchFamily="34" charset="0"/>
-                        </a:rPr>
-                        <a:t>..</a:t>
-                      </a:r>
+                      <a:endParaRPr lang="ru-RU" sz="1400" b="0" dirty="0">
+                        <a:effectLst/>
+                        <a:latin typeface="Times New Roman" panose="02020603050405020304" pitchFamily="18" charset="0"/>
+                        <a:ea typeface="Times New Roman" panose="02020603050405020304" pitchFamily="18" charset="0"/>
+                        <a:cs typeface="Times New Roman" panose="02020603050405020304" pitchFamily="18" charset="0"/>
+                      </a:endParaRPr>
                     </a:p>
                   </a:txBody>
-                  <a:tcPr/>
+                  <a:tcPr anchor="ctr"/>
                 </a:tc>
                 <a:extLst>
                   <a:ext uri="{0D108BD9-81ED-4DB2-BD59-A6C34878D82A}">
@@ -6417,50 +6355,24 @@
                     <a:p>
                       <a:pPr marL="0" algn="l" defTabSz="914400" rtl="0" eaLnBrk="1" latinLnBrk="0" hangingPunct="1"/>
                       <a:r>
-                        <a:rPr lang="ru-RU" sz="1400" b="1" kern="1200" dirty="0">
-                          <a:solidFill>
-                            <a:schemeClr val="dk1"/>
-                          </a:solidFill>
-                          <a:latin typeface="Arial" panose="020B0604020202020204" pitchFamily="34" charset="0"/>
-                          <a:ea typeface="+mn-ea"/>
-                          <a:cs typeface="Arial" panose="020B0604020202020204" pitchFamily="34" charset="0"/>
-                        </a:rPr>
-                        <a:t>Вид деятельности (напечатать вид деятельности)</a:t>
-                      </a:r>
-                    </a:p>
-                    <a:p>
-                      <a:pPr marL="361950" indent="0" algn="l" defTabSz="914400" rtl="0" eaLnBrk="1" latinLnBrk="0" hangingPunct="1"/>
-                      <a:r>
-                        <a:rPr lang="ru-RU" sz="1400" kern="1200" dirty="0">
+                        <a:rPr lang="ru-RU" sz="1400" b="0" i="0" kern="1200" dirty="0">
                           <a:solidFill>
                             <a:schemeClr val="dk1"/>
                           </a:solidFill>
                           <a:effectLst/>
-                          <a:latin typeface="+mn-lt"/>
+                          <a:latin typeface="Times New Roman" panose="02020603050405020304" pitchFamily="18" charset="0"/>
                           <a:ea typeface="+mn-ea"/>
-                          <a:cs typeface="+mn-cs"/>
+                          <a:cs typeface="Times New Roman" panose="02020603050405020304" pitchFamily="18" charset="0"/>
                         </a:rPr>
-                        <a:t>текст. </a:t>
+                        <a:t>Выбраны и обоснованы инструменты реализации</a:t>
                       </a:r>
-                    </a:p>
-                    <a:p>
-                      <a:pPr marL="361950" indent="0" algn="l" defTabSz="914400" rtl="0" eaLnBrk="1" latinLnBrk="0" hangingPunct="1"/>
-                      <a:r>
-                        <a:rPr lang="ru-RU" sz="1400" b="1" kern="1200" dirty="0">
-                          <a:solidFill>
-                            <a:schemeClr val="dk1"/>
-                          </a:solidFill>
-                          <a:effectLst/>
-                          <a:latin typeface="+mn-lt"/>
-                          <a:ea typeface="+mn-ea"/>
-                          <a:cs typeface="+mn-cs"/>
-                        </a:rPr>
-                        <a:t>…..</a:t>
-                      </a:r>
-                      <a:endParaRPr lang="ru-RU" sz="1400" dirty="0"/>
+                      <a:endParaRPr lang="ru-RU" sz="1400" b="0" dirty="0">
+                        <a:latin typeface="Times New Roman" panose="02020603050405020304" pitchFamily="18" charset="0"/>
+                        <a:cs typeface="Times New Roman" panose="02020603050405020304" pitchFamily="18" charset="0"/>
+                      </a:endParaRPr>
                     </a:p>
                   </a:txBody>
-                  <a:tcPr/>
+                  <a:tcPr anchor="ctr"/>
                 </a:tc>
                 <a:tc>
                   <a:txBody>
@@ -6475,65 +6387,108 @@
                         <a:buNone/>
                       </a:pPr>
                       <a:r>
-                        <a:rPr lang="ru-RU" sz="1400" dirty="0">
+                        <a:rPr lang="en-US" sz="1400" b="0" i="0" kern="1200" dirty="0">
+                          <a:solidFill>
+                            <a:schemeClr val="dk1"/>
+                          </a:solidFill>
                           <a:effectLst/>
-                          <a:latin typeface="Arial" panose="020B0604020202020204" pitchFamily="34" charset="0"/>
-                          <a:ea typeface="Times New Roman" panose="02020603050405020304" pitchFamily="18" charset="0"/>
-                          <a:cs typeface="Arial" panose="020B0604020202020204" pitchFamily="34" charset="0"/>
+                          <a:latin typeface="Times New Roman" panose="02020603050405020304" pitchFamily="18" charset="0"/>
+                          <a:ea typeface="+mn-ea"/>
+                          <a:cs typeface="Times New Roman" panose="02020603050405020304" pitchFamily="18" charset="0"/>
                         </a:rPr>
-                        <a:t>Из задания на ДП (перечень что реализовать в программном продукте)</a:t>
+                        <a:t>Python, PySide6, SQLite, </a:t>
                       </a:r>
-                    </a:p>
-                    <a:p>
-                      <a:pPr marL="0" marR="165100" lvl="0" indent="0" algn="just" defTabSz="914400" rtl="0" eaLnBrk="1" fontAlgn="auto" latinLnBrk="0" hangingPunct="1">
-                        <a:lnSpc>
-                          <a:spcPct val="100000"/>
-                        </a:lnSpc>
-                        <a:spcBef>
-                          <a:spcPts val="0"/>
-                        </a:spcBef>
-                        <a:spcAft>
-                          <a:spcPts val="0"/>
-                        </a:spcAft>
-                        <a:buClrTx/>
-                        <a:buSzTx/>
-                        <a:buFont typeface="Symbol" panose="05050102010706020507" pitchFamily="18" charset="2"/>
-                        <a:buNone/>
-                        <a:tabLst/>
-                        <a:defRPr/>
-                      </a:pPr>
                       <a:r>
-                        <a:rPr lang="ru-RU" sz="1400" dirty="0">
-                          <a:latin typeface="Arial" panose="020B0604020202020204" pitchFamily="34" charset="0"/>
-                          <a:cs typeface="Arial" panose="020B0604020202020204" pitchFamily="34" charset="0"/>
+                        <a:rPr lang="en-US" sz="1400" b="0" i="0" kern="1200" dirty="0" err="1">
+                          <a:solidFill>
+                            <a:schemeClr val="dk1"/>
+                          </a:solidFill>
+                          <a:effectLst/>
+                          <a:latin typeface="Times New Roman" panose="02020603050405020304" pitchFamily="18" charset="0"/>
+                          <a:ea typeface="+mn-ea"/>
+                          <a:cs typeface="Times New Roman" panose="02020603050405020304" pitchFamily="18" charset="0"/>
                         </a:rPr>
-                        <a:t>текст</a:t>
+                        <a:t>SQLAlchemy</a:t>
                       </a:r>
-                    </a:p>
-                    <a:p>
-                      <a:pPr marL="0" marR="165100" lvl="0" indent="0" algn="just">
-                        <a:spcAft>
-                          <a:spcPts val="0"/>
-                        </a:spcAft>
-                        <a:buFont typeface="Symbol" panose="05050102010706020507" pitchFamily="18" charset="2"/>
-                        <a:buNone/>
-                      </a:pPr>
                       <a:r>
-                        <a:rPr lang="ru-RU" sz="1400" dirty="0">
+                        <a:rPr lang="en-US" sz="1400" b="0" i="0" kern="1200" dirty="0">
+                          <a:solidFill>
+                            <a:schemeClr val="dk1"/>
+                          </a:solidFill>
                           <a:effectLst/>
-                          <a:latin typeface="Arial" panose="020B0604020202020204" pitchFamily="34" charset="0"/>
-                          <a:ea typeface="Times New Roman" panose="02020603050405020304" pitchFamily="18" charset="0"/>
-                          <a:cs typeface="Arial" panose="020B0604020202020204" pitchFamily="34" charset="0"/>
+                          <a:latin typeface="Times New Roman" panose="02020603050405020304" pitchFamily="18" charset="0"/>
+                          <a:ea typeface="+mn-ea"/>
+                          <a:cs typeface="Times New Roman" panose="02020603050405020304" pitchFamily="18" charset="0"/>
                         </a:rPr>
-                        <a:t>..</a:t>
+                        <a:t>, </a:t>
                       </a:r>
-                      <a:endParaRPr lang="ru-RU" sz="1400" dirty="0">
-                        <a:latin typeface="Arial" panose="020B0604020202020204" pitchFamily="34" charset="0"/>
-                        <a:cs typeface="Arial" panose="020B0604020202020204" pitchFamily="34" charset="0"/>
+                      <a:r>
+                        <a:rPr lang="en-US" sz="1400" b="0" i="0" kern="1200" dirty="0" err="1">
+                          <a:solidFill>
+                            <a:schemeClr val="dk1"/>
+                          </a:solidFill>
+                          <a:effectLst/>
+                          <a:latin typeface="Times New Roman" panose="02020603050405020304" pitchFamily="18" charset="0"/>
+                          <a:ea typeface="+mn-ea"/>
+                          <a:cs typeface="Times New Roman" panose="02020603050405020304" pitchFamily="18" charset="0"/>
+                        </a:rPr>
+                        <a:t>ReportLab</a:t>
+                      </a:r>
+                      <a:r>
+                        <a:rPr lang="en-US" sz="1400" b="0" i="0" kern="1200" dirty="0">
+                          <a:solidFill>
+                            <a:schemeClr val="dk1"/>
+                          </a:solidFill>
+                          <a:effectLst/>
+                          <a:latin typeface="Times New Roman" panose="02020603050405020304" pitchFamily="18" charset="0"/>
+                          <a:ea typeface="+mn-ea"/>
+                          <a:cs typeface="Times New Roman" panose="02020603050405020304" pitchFamily="18" charset="0"/>
+                        </a:rPr>
+                        <a:t>, </a:t>
+                      </a:r>
+                      <a:r>
+                        <a:rPr lang="en-US" sz="1400" b="0" i="0" kern="1200" dirty="0" err="1">
+                          <a:solidFill>
+                            <a:schemeClr val="dk1"/>
+                          </a:solidFill>
+                          <a:effectLst/>
+                          <a:latin typeface="Times New Roman" panose="02020603050405020304" pitchFamily="18" charset="0"/>
+                          <a:ea typeface="+mn-ea"/>
+                          <a:cs typeface="Times New Roman" panose="02020603050405020304" pitchFamily="18" charset="0"/>
+                        </a:rPr>
+                        <a:t>OpenPyXL</a:t>
+                      </a:r>
+                      <a:r>
+                        <a:rPr lang="en-US" sz="1400" b="0" i="0" kern="1200" dirty="0">
+                          <a:solidFill>
+                            <a:schemeClr val="dk1"/>
+                          </a:solidFill>
+                          <a:effectLst/>
+                          <a:latin typeface="Times New Roman" panose="02020603050405020304" pitchFamily="18" charset="0"/>
+                          <a:ea typeface="+mn-ea"/>
+                          <a:cs typeface="Times New Roman" panose="02020603050405020304" pitchFamily="18" charset="0"/>
+                        </a:rPr>
+                        <a:t>, </a:t>
+                      </a:r>
+                      <a:r>
+                        <a:rPr lang="en-US" sz="1400" b="0" i="0" kern="1200" dirty="0" err="1">
+                          <a:solidFill>
+                            <a:schemeClr val="dk1"/>
+                          </a:solidFill>
+                          <a:effectLst/>
+                          <a:latin typeface="Times New Roman" panose="02020603050405020304" pitchFamily="18" charset="0"/>
+                          <a:ea typeface="+mn-ea"/>
+                          <a:cs typeface="Times New Roman" panose="02020603050405020304" pitchFamily="18" charset="0"/>
+                        </a:rPr>
+                        <a:t>pytest</a:t>
+                      </a:r>
+                      <a:endParaRPr lang="ru-RU" sz="1400" b="0" dirty="0">
+                        <a:latin typeface="Times New Roman" panose="02020603050405020304" pitchFamily="18" charset="0"/>
+                        <a:cs typeface="Times New Roman" panose="02020603050405020304" pitchFamily="18" charset="0"/>
                       </a:endParaRPr>
                     </a:p>
                   </a:txBody>
-                  <a:tcPr/>
+                  <a:tcPr anchor="ctr"/>
                 </a:tc>
                 <a:extLst>
                   <a:ext uri="{0D108BD9-81ED-4DB2-BD59-A6C34878D82A}">
@@ -6549,50 +6504,24 @@
                     <a:p>
                       <a:pPr marL="0" algn="l" defTabSz="914400" rtl="0" eaLnBrk="1" latinLnBrk="0" hangingPunct="1"/>
                       <a:r>
-                        <a:rPr lang="ru-RU" sz="1400" b="1" kern="1200" dirty="0">
-                          <a:solidFill>
-                            <a:schemeClr val="dk1"/>
-                          </a:solidFill>
-                          <a:latin typeface="Arial" panose="020B0604020202020204" pitchFamily="34" charset="0"/>
-                          <a:ea typeface="+mn-ea"/>
-                          <a:cs typeface="Arial" panose="020B0604020202020204" pitchFamily="34" charset="0"/>
-                        </a:rPr>
-                        <a:t>Вид деятельности (напечатать вид деятельности)</a:t>
-                      </a:r>
-                    </a:p>
-                    <a:p>
-                      <a:pPr marL="361950" indent="0" algn="l" defTabSz="914400" rtl="0" eaLnBrk="1" latinLnBrk="0" hangingPunct="1"/>
-                      <a:r>
-                        <a:rPr lang="ru-RU" sz="1400" kern="1200" dirty="0">
+                        <a:rPr lang="ru-RU" sz="1400" b="0" i="0" kern="1200" dirty="0">
                           <a:solidFill>
                             <a:schemeClr val="dk1"/>
                           </a:solidFill>
                           <a:effectLst/>
-                          <a:latin typeface="+mn-lt"/>
+                          <a:latin typeface="Times New Roman" panose="02020603050405020304" pitchFamily="18" charset="0"/>
                           <a:ea typeface="+mn-ea"/>
-                          <a:cs typeface="+mn-cs"/>
+                          <a:cs typeface="Times New Roman" panose="02020603050405020304" pitchFamily="18" charset="0"/>
                         </a:rPr>
-                        <a:t>текст</a:t>
+                        <a:t>Составлено техническое задание по ГОСТ 34.602-2020</a:t>
                       </a:r>
-                    </a:p>
-                    <a:p>
-                      <a:pPr marL="361950" indent="0" algn="l" defTabSz="914400" rtl="0" eaLnBrk="1" latinLnBrk="0" hangingPunct="1"/>
-                      <a:r>
-                        <a:rPr lang="ru-RU" sz="1400" b="1" kern="1200" dirty="0">
-                          <a:solidFill>
-                            <a:schemeClr val="dk1"/>
-                          </a:solidFill>
-                          <a:effectLst/>
-                          <a:latin typeface="+mn-lt"/>
-                          <a:ea typeface="+mn-ea"/>
-                          <a:cs typeface="+mn-cs"/>
-                        </a:rPr>
-                        <a:t>…..</a:t>
-                      </a:r>
-                      <a:endParaRPr lang="ru-RU" sz="1400" dirty="0"/>
+                      <a:endParaRPr lang="ru-RU" sz="1400" b="0" dirty="0">
+                        <a:latin typeface="Times New Roman" panose="02020603050405020304" pitchFamily="18" charset="0"/>
+                        <a:cs typeface="Times New Roman" panose="02020603050405020304" pitchFamily="18" charset="0"/>
+                      </a:endParaRPr>
                     </a:p>
                   </a:txBody>
-                  <a:tcPr/>
+                  <a:tcPr anchor="ctr"/>
                 </a:tc>
                 <a:tc>
                   <a:txBody>
@@ -6607,61 +6536,26 @@
                         <a:buNone/>
                       </a:pPr>
                       <a:r>
-                        <a:rPr lang="ru-RU" sz="1400" dirty="0">
+                        <a:rPr lang="ru-RU" sz="1400" b="0" i="0" kern="1200" dirty="0">
+                          <a:solidFill>
+                            <a:schemeClr val="dk1"/>
+                          </a:solidFill>
                           <a:effectLst/>
-                          <a:latin typeface="Arial" panose="020B0604020202020204" pitchFamily="34" charset="0"/>
-                          <a:ea typeface="Times New Roman" panose="02020603050405020304" pitchFamily="18" charset="0"/>
-                          <a:cs typeface="Arial" panose="020B0604020202020204" pitchFamily="34" charset="0"/>
+                          <a:latin typeface="Times New Roman" panose="02020603050405020304" pitchFamily="18" charset="0"/>
+                          <a:ea typeface="+mn-ea"/>
+                          <a:cs typeface="Times New Roman" panose="02020603050405020304" pitchFamily="18" charset="0"/>
                         </a:rPr>
-                        <a:t>Из задания на ДП (перечень что реализовать в программном продукте)</a:t>
+                        <a:t>Отражены функциональные требования, требования к ПО, безопасности и тестированию.</a:t>
                       </a:r>
-                    </a:p>
-                    <a:p>
-                      <a:pPr marL="0" marR="165100" lvl="0" indent="0" algn="just" defTabSz="914400" rtl="0" eaLnBrk="1" fontAlgn="auto" latinLnBrk="0" hangingPunct="1">
-                        <a:lnSpc>
-                          <a:spcPct val="100000"/>
-                        </a:lnSpc>
-                        <a:spcBef>
-                          <a:spcPts val="0"/>
-                        </a:spcBef>
-                        <a:spcAft>
-                          <a:spcPts val="0"/>
-                        </a:spcAft>
-                        <a:buClrTx/>
-                        <a:buSzTx/>
-                        <a:buFont typeface="Symbol" panose="05050102010706020507" pitchFamily="18" charset="2"/>
-                        <a:buNone/>
-                        <a:tabLst/>
-                        <a:defRPr/>
-                      </a:pPr>
-                      <a:r>
-                        <a:rPr lang="ru-RU" sz="1400" dirty="0">
-                          <a:latin typeface="Arial" panose="020B0604020202020204" pitchFamily="34" charset="0"/>
-                          <a:cs typeface="Arial" panose="020B0604020202020204" pitchFamily="34" charset="0"/>
-                        </a:rPr>
-                        <a:t>текст</a:t>
-                      </a:r>
-                    </a:p>
-                    <a:p>
-                      <a:pPr marL="0" marR="165100" lvl="0" indent="0" algn="just">
-                        <a:spcAft>
-                          <a:spcPts val="0"/>
-                        </a:spcAft>
-                        <a:buFont typeface="Symbol" panose="05050102010706020507" pitchFamily="18" charset="2"/>
-                        <a:buNone/>
-                      </a:pPr>
-                      <a:r>
-                        <a:rPr lang="ru-RU" sz="1400" dirty="0">
-                          <a:effectLst/>
-                          <a:latin typeface="Arial" panose="020B0604020202020204" pitchFamily="34" charset="0"/>
-                          <a:ea typeface="Times New Roman" panose="02020603050405020304" pitchFamily="18" charset="0"/>
-                          <a:cs typeface="Arial" panose="020B0604020202020204" pitchFamily="34" charset="0"/>
-                        </a:rPr>
-                        <a:t>..</a:t>
-                      </a:r>
+                      <a:endParaRPr lang="ru-RU" sz="1400" b="0" dirty="0">
+                        <a:effectLst/>
+                        <a:latin typeface="Times New Roman" panose="02020603050405020304" pitchFamily="18" charset="0"/>
+                        <a:ea typeface="Times New Roman" panose="02020603050405020304" pitchFamily="18" charset="0"/>
+                        <a:cs typeface="Times New Roman" panose="02020603050405020304" pitchFamily="18" charset="0"/>
+                      </a:endParaRPr>
                     </a:p>
                   </a:txBody>
-                  <a:tcPr/>
+                  <a:tcPr anchor="ctr"/>
                 </a:tc>
                 <a:extLst>
                   <a:ext uri="{0D108BD9-81ED-4DB2-BD59-A6C34878D82A}">
@@ -6677,126 +6571,119 @@
                     <a:p>
                       <a:pPr marL="0" algn="l" defTabSz="914400" rtl="0" eaLnBrk="1" latinLnBrk="0" hangingPunct="1"/>
                       <a:r>
-                        <a:rPr lang="ru-RU" sz="1400" b="1" kern="1200" dirty="0">
+                        <a:rPr lang="ru-RU" sz="1400" b="0" i="0" kern="1200" dirty="0">
                           <a:solidFill>
                             <a:schemeClr val="dk1"/>
                           </a:solidFill>
-                          <a:latin typeface="Arial" panose="020B0604020202020204" pitchFamily="34" charset="0"/>
+                          <a:effectLst/>
+                          <a:latin typeface="Times New Roman" panose="02020603050405020304" pitchFamily="18" charset="0"/>
                           <a:ea typeface="+mn-ea"/>
-                          <a:cs typeface="Arial" panose="020B0604020202020204" pitchFamily="34" charset="0"/>
+                          <a:cs typeface="Times New Roman" panose="02020603050405020304" pitchFamily="18" charset="0"/>
                         </a:rPr>
-                        <a:t>Вид деятельности (напечатать вид деятельности)</a:t>
+                        <a:t>Выполнено проектирование</a:t>
                       </a:r>
-                    </a:p>
-                    <a:p>
-                      <a:pPr marL="361950" indent="0" algn="l" defTabSz="914400" rtl="0" eaLnBrk="1" latinLnBrk="0" hangingPunct="1"/>
-                      <a:r>
-                        <a:rPr lang="ru-RU" sz="1400" b="1" kern="1200" dirty="0">
-                          <a:solidFill>
-                            <a:schemeClr val="dk1"/>
-                          </a:solidFill>
-                          <a:latin typeface="Arial" panose="020B0604020202020204" pitchFamily="34" charset="0"/>
-                          <a:ea typeface="+mn-ea"/>
-                          <a:cs typeface="Arial" panose="020B0604020202020204" pitchFamily="34" charset="0"/>
-                        </a:rPr>
-                        <a:t>текст</a:t>
-                      </a:r>
-                    </a:p>
-                    <a:p>
-                      <a:pPr marL="361950" indent="0" algn="l" defTabSz="914400" rtl="0" eaLnBrk="1" latinLnBrk="0" hangingPunct="1"/>
-                      <a:r>
-                        <a:rPr lang="ru-RU" sz="1400" b="1" kern="1200" dirty="0">
-                          <a:solidFill>
-                            <a:schemeClr val="dk1"/>
-                          </a:solidFill>
-                          <a:latin typeface="Arial" panose="020B0604020202020204" pitchFamily="34" charset="0"/>
-                          <a:ea typeface="+mn-ea"/>
-                          <a:cs typeface="Arial" panose="020B0604020202020204" pitchFamily="34" charset="0"/>
-                        </a:rPr>
-                        <a:t>…..</a:t>
-                      </a:r>
+                      <a:endParaRPr lang="ru-RU" sz="1400" b="0" kern="1200" dirty="0">
+                        <a:solidFill>
+                          <a:schemeClr val="dk1"/>
+                        </a:solidFill>
+                        <a:latin typeface="Times New Roman" panose="02020603050405020304" pitchFamily="18" charset="0"/>
+                        <a:ea typeface="+mn-ea"/>
+                        <a:cs typeface="Times New Roman" panose="02020603050405020304" pitchFamily="18" charset="0"/>
+                      </a:endParaRPr>
                     </a:p>
                   </a:txBody>
-                  <a:tcPr/>
+                  <a:tcPr anchor="ctr"/>
                 </a:tc>
                 <a:tc>
                   <a:txBody>
                     <a:bodyPr/>
                     <a:lstStyle/>
                     <a:p>
-                      <a:pPr marL="0" marR="165100" lvl="0" indent="0" algn="just">
-                        <a:spcAft>
-                          <a:spcPts val="0"/>
-                        </a:spcAft>
-                        <a:buFont typeface="Symbol" panose="05050102010706020507" pitchFamily="18" charset="2"/>
-                        <a:buNone/>
-                      </a:pPr>
+                      <a:pPr marL="0" lvl="1" indent="0" algn="l"/>
                       <a:r>
-                        <a:rPr lang="ru-RU" sz="1400" kern="1200" dirty="0">
+                        <a:rPr lang="ru-RU" sz="1400" b="0" i="0" kern="1200" dirty="0">
                           <a:solidFill>
                             <a:schemeClr val="dk1"/>
                           </a:solidFill>
                           <a:effectLst/>
-                          <a:latin typeface="Arial" panose="020B0604020202020204" pitchFamily="34" charset="0"/>
-                          <a:ea typeface="Times New Roman" panose="02020603050405020304" pitchFamily="18" charset="0"/>
-                          <a:cs typeface="Arial" panose="020B0604020202020204" pitchFamily="34" charset="0"/>
+                          <a:latin typeface="Times New Roman" panose="02020603050405020304" pitchFamily="18" charset="0"/>
+                          <a:ea typeface="+mn-ea"/>
+                          <a:cs typeface="Times New Roman" panose="02020603050405020304" pitchFamily="18" charset="0"/>
                         </a:rPr>
-                        <a:t>Из задания на ДП (перечень что реализовать в программном продукте)</a:t>
+                        <a:t>Разработана архитектура локального монолитного приложения (MVC).</a:t>
                       </a:r>
                     </a:p>
                     <a:p>
-                      <a:pPr marL="0" marR="165100" lvl="0" indent="0" algn="just" defTabSz="914400" rtl="0" eaLnBrk="1" fontAlgn="auto" latinLnBrk="0" hangingPunct="1">
-                        <a:lnSpc>
-                          <a:spcPct val="100000"/>
-                        </a:lnSpc>
-                        <a:spcBef>
-                          <a:spcPts val="0"/>
-                        </a:spcBef>
-                        <a:spcAft>
-                          <a:spcPts val="0"/>
-                        </a:spcAft>
-                        <a:buClrTx/>
-                        <a:buSzTx/>
-                        <a:buFont typeface="Symbol" panose="05050102010706020507" pitchFamily="18" charset="2"/>
-                        <a:buNone/>
-                        <a:tabLst/>
-                        <a:defRPr/>
-                      </a:pPr>
+                      <a:pPr marL="0" lvl="1" indent="0" algn="l"/>
                       <a:r>
-                        <a:rPr lang="ru-RU" sz="1400" kern="1200" dirty="0">
+                        <a:rPr lang="ru-RU" sz="1400" b="0" i="0" kern="1200" dirty="0">
                           <a:solidFill>
                             <a:schemeClr val="dk1"/>
                           </a:solidFill>
                           <a:effectLst/>
-                          <a:latin typeface="Arial" panose="020B0604020202020204" pitchFamily="34" charset="0"/>
-                          <a:cs typeface="Arial" panose="020B0604020202020204" pitchFamily="34" charset="0"/>
+                          <a:latin typeface="Times New Roman" panose="02020603050405020304" pitchFamily="18" charset="0"/>
+                          <a:ea typeface="+mn-ea"/>
+                          <a:cs typeface="Times New Roman" panose="02020603050405020304" pitchFamily="18" charset="0"/>
                         </a:rPr>
-                        <a:t>текст</a:t>
+                        <a:t>Построены диаграммы </a:t>
                       </a:r>
-                    </a:p>
-                    <a:p>
-                      <a:pPr marL="0" marR="165100" lvl="0" indent="0" algn="just">
-                        <a:spcAft>
-                          <a:spcPts val="0"/>
-                        </a:spcAft>
-                        <a:buFont typeface="Symbol" panose="05050102010706020507" pitchFamily="18" charset="2"/>
-                        <a:buNone/>
-                      </a:pPr>
                       <a:r>
-                        <a:rPr lang="ru-RU" sz="1400" kern="1200" dirty="0">
+                        <a:rPr lang="ru-RU" sz="1400" b="0" i="0" kern="1200" dirty="0" err="1">
                           <a:solidFill>
                             <a:schemeClr val="dk1"/>
                           </a:solidFill>
                           <a:effectLst/>
-                          <a:latin typeface="Arial" panose="020B0604020202020204" pitchFamily="34" charset="0"/>
-                          <a:ea typeface="Times New Roman" panose="02020603050405020304" pitchFamily="18" charset="0"/>
-                          <a:cs typeface="Arial" panose="020B0604020202020204" pitchFamily="34" charset="0"/>
+                          <a:latin typeface="Times New Roman" panose="02020603050405020304" pitchFamily="18" charset="0"/>
+                          <a:ea typeface="+mn-ea"/>
+                          <a:cs typeface="Times New Roman" panose="02020603050405020304" pitchFamily="18" charset="0"/>
                         </a:rPr>
-                        <a:t>..</a:t>
+                        <a:t>Use</a:t>
+                      </a:r>
+                      <a:r>
+                        <a:rPr lang="ru-RU" sz="1400" b="0" i="0" kern="1200" dirty="0">
+                          <a:solidFill>
+                            <a:schemeClr val="dk1"/>
+                          </a:solidFill>
+                          <a:effectLst/>
+                          <a:latin typeface="Times New Roman" panose="02020603050405020304" pitchFamily="18" charset="0"/>
+                          <a:ea typeface="+mn-ea"/>
+                          <a:cs typeface="Times New Roman" panose="02020603050405020304" pitchFamily="18" charset="0"/>
+                        </a:rPr>
+                        <a:t> Case и DFD.</a:t>
+                      </a:r>
+                    </a:p>
+                    <a:p>
+                      <a:pPr marL="0" lvl="1" indent="0" algn="l"/>
+                      <a:r>
+                        <a:rPr lang="ru-RU" sz="1400" b="0" i="0" kern="1200" dirty="0">
+                          <a:solidFill>
+                            <a:schemeClr val="dk1"/>
+                          </a:solidFill>
+                          <a:effectLst/>
+                          <a:latin typeface="Times New Roman" panose="02020603050405020304" pitchFamily="18" charset="0"/>
+                          <a:ea typeface="+mn-ea"/>
+                          <a:cs typeface="Times New Roman" panose="02020603050405020304" pitchFamily="18" charset="0"/>
+                        </a:rPr>
+                        <a:t>Спроектирована база данных (15 таблиц, 3НФ, ER-модель).</a:t>
+                      </a:r>
+                    </a:p>
+                    <a:p>
+                      <a:pPr marL="0" lvl="1" indent="0" algn="l"/>
+                      <a:r>
+                        <a:rPr lang="ru-RU" sz="1400" b="0" i="0" kern="1200" dirty="0">
+                          <a:solidFill>
+                            <a:schemeClr val="dk1"/>
+                          </a:solidFill>
+                          <a:effectLst/>
+                          <a:latin typeface="Times New Roman" panose="02020603050405020304" pitchFamily="18" charset="0"/>
+                          <a:ea typeface="+mn-ea"/>
+                          <a:cs typeface="Times New Roman" panose="02020603050405020304" pitchFamily="18" charset="0"/>
+                        </a:rPr>
+                        <a:t>Созданы прототипы 7 окон пользовательского интерфейса.</a:t>
                       </a:r>
                     </a:p>
                   </a:txBody>
-                  <a:tcPr/>
+                  <a:tcPr anchor="ctr"/>
                 </a:tc>
                 <a:extLst>
                   <a:ext uri="{0D108BD9-81ED-4DB2-BD59-A6C34878D82A}">
@@ -6812,47 +6699,28 @@
                     <a:p>
                       <a:pPr marL="0" algn="l" defTabSz="914400" rtl="0" eaLnBrk="1" latinLnBrk="0" hangingPunct="1"/>
                       <a:r>
-                        <a:rPr lang="ru-RU" sz="1400" b="1" kern="1200" dirty="0">
+                        <a:rPr lang="ru-RU" sz="1400" b="0" i="0" kern="1200" dirty="0">
                           <a:solidFill>
                             <a:schemeClr val="dk1"/>
                           </a:solidFill>
-                          <a:latin typeface="Arial" panose="020B0604020202020204" pitchFamily="34" charset="0"/>
+                          <a:effectLst/>
+                          <a:latin typeface="Times New Roman" panose="02020603050405020304" pitchFamily="18" charset="0"/>
                           <a:ea typeface="+mn-ea"/>
-                          <a:cs typeface="Arial" panose="020B0604020202020204" pitchFamily="34" charset="0"/>
+                          <a:cs typeface="Times New Roman" panose="02020603050405020304" pitchFamily="18" charset="0"/>
                         </a:rPr>
-                        <a:t>Вид деятельности (напечатать вид деятельности)</a:t>
+                        <a:t>Разработан программный продукт</a:t>
                       </a:r>
-                    </a:p>
-                    <a:p>
-                      <a:pPr marL="361950" indent="0" algn="l" defTabSz="914400" rtl="0" eaLnBrk="1" latinLnBrk="0" hangingPunct="1"/>
-                      <a:r>
-                        <a:rPr lang="ru-RU" sz="1400" b="1" kern="1200" dirty="0">
-                          <a:solidFill>
-                            <a:schemeClr val="dk1"/>
-                          </a:solidFill>
-                          <a:latin typeface="Arial" panose="020B0604020202020204" pitchFamily="34" charset="0"/>
-                          <a:ea typeface="+mn-ea"/>
-                          <a:cs typeface="Arial" panose="020B0604020202020204" pitchFamily="34" charset="0"/>
-                        </a:rPr>
-                        <a:t>текст</a:t>
-                      </a:r>
-                    </a:p>
-                    <a:p>
-                      <a:pPr marL="361950" indent="0" algn="l" defTabSz="914400" rtl="0" eaLnBrk="1" latinLnBrk="0" hangingPunct="1"/>
-                      <a:r>
-                        <a:rPr lang="ru-RU" sz="1400" b="1" kern="1200" dirty="0">
-                          <a:solidFill>
-                            <a:schemeClr val="dk1"/>
-                          </a:solidFill>
-                          <a:latin typeface="Arial" panose="020B0604020202020204" pitchFamily="34" charset="0"/>
-                          <a:ea typeface="+mn-ea"/>
-                          <a:cs typeface="Arial" panose="020B0604020202020204" pitchFamily="34" charset="0"/>
-                        </a:rPr>
-                        <a:t>…..</a:t>
-                      </a:r>
+                      <a:endParaRPr lang="ru-RU" sz="1400" b="0" kern="1200" dirty="0">
+                        <a:solidFill>
+                          <a:schemeClr val="dk1"/>
+                        </a:solidFill>
+                        <a:latin typeface="Times New Roman" panose="02020603050405020304" pitchFamily="18" charset="0"/>
+                        <a:ea typeface="+mn-ea"/>
+                        <a:cs typeface="Times New Roman" panose="02020603050405020304" pitchFamily="18" charset="0"/>
+                      </a:endParaRPr>
                     </a:p>
                   </a:txBody>
-                  <a:tcPr/>
+                  <a:tcPr anchor="ctr"/>
                 </a:tc>
                 <a:tc>
                   <a:txBody>
@@ -6867,20 +6735,110 @@
                         <a:buNone/>
                       </a:pPr>
                       <a:r>
-                        <a:rPr lang="ru-RU" sz="1400" kern="1200" dirty="0">
+                        <a:rPr lang="ru-RU" sz="1400" b="0" i="0" kern="1200" dirty="0">
                           <a:solidFill>
                             <a:schemeClr val="dk1"/>
                           </a:solidFill>
                           <a:effectLst/>
-                          <a:latin typeface="Arial" panose="020B0604020202020204" pitchFamily="34" charset="0"/>
-                          <a:ea typeface="Times New Roman" panose="02020603050405020304" pitchFamily="18" charset="0"/>
-                          <a:cs typeface="Arial" panose="020B0604020202020204" pitchFamily="34" charset="0"/>
+                          <a:latin typeface="Times New Roman" panose="02020603050405020304" pitchFamily="18" charset="0"/>
+                          <a:ea typeface="+mn-ea"/>
+                          <a:cs typeface="Times New Roman" panose="02020603050405020304" pitchFamily="18" charset="0"/>
                         </a:rPr>
-                        <a:t>Из задания на ДП (перечень что реализовать в программном продукте)</a:t>
+                        <a:t>Десктоп-приложение «СУПО» с полным циклом учёта питания и складских операций.</a:t>
+                      </a:r>
+                      <a:endParaRPr lang="ru-RU" sz="1400" b="0" kern="1200" dirty="0">
+                        <a:solidFill>
+                          <a:schemeClr val="dk1"/>
+                        </a:solidFill>
+                        <a:effectLst/>
+                        <a:latin typeface="Times New Roman" panose="02020603050405020304" pitchFamily="18" charset="0"/>
+                        <a:ea typeface="Times New Roman" panose="02020603050405020304" pitchFamily="18" charset="0"/>
+                        <a:cs typeface="Times New Roman" panose="02020603050405020304" pitchFamily="18" charset="0"/>
+                      </a:endParaRPr>
+                    </a:p>
+                  </a:txBody>
+                  <a:tcPr anchor="ctr"/>
+                </a:tc>
+                <a:extLst>
+                  <a:ext uri="{0D108BD9-81ED-4DB2-BD59-A6C34878D82A}">
+                    <a16:rowId xmlns:a16="http://schemas.microsoft.com/office/drawing/2014/main" val="1084815917"/>
+                  </a:ext>
+                </a:extLst>
+              </a:tr>
+            </a:tbl>
+          </a:graphicData>
+        </a:graphic>
+      </p:graphicFrame>
+      <p:graphicFrame>
+        <p:nvGraphicFramePr>
+          <p:cNvPr id="5" name="Таблица 4">
+            <a:extLst>
+              <a:ext uri="{FF2B5EF4-FFF2-40B4-BE49-F238E27FC236}">
+                <a16:creationId xmlns:a16="http://schemas.microsoft.com/office/drawing/2014/main" id="{C21AFB60-0216-4FC8-B3C7-5348BCD2C6C6}"/>
+              </a:ext>
+            </a:extLst>
+          </p:cNvPr>
+          <p:cNvGraphicFramePr>
+            <a:graphicFrameLocks noGrp="1"/>
+          </p:cNvGraphicFramePr>
+          <p:nvPr>
+            <p:extLst>
+              <p:ext uri="{D42A27DB-BD31-4B8C-83A1-F6EECF244321}">
+                <p14:modId xmlns:p14="http://schemas.microsoft.com/office/powerpoint/2010/main" val="4198836802"/>
+              </p:ext>
+            </p:extLst>
+          </p:nvPr>
+        </p:nvGraphicFramePr>
+        <p:xfrm>
+          <a:off x="351692" y="644057"/>
+          <a:ext cx="11215893" cy="6057845"/>
+        </p:xfrm>
+        <a:graphic>
+          <a:graphicData uri="http://schemas.openxmlformats.org/drawingml/2006/table">
+            <a:tbl>
+              <a:tblPr firstRow="1" bandRow="1">
+                <a:tableStyleId>{5C22544A-7EE6-4342-B048-85BDC9FD1C3A}</a:tableStyleId>
+              </a:tblPr>
+              <a:tblGrid>
+                <a:gridCol w="5174373">
+                  <a:extLst>
+                    <a:ext uri="{9D8B030D-6E8A-4147-A177-3AD203B41FA5}">
+                      <a16:colId xmlns:a16="http://schemas.microsoft.com/office/drawing/2014/main" val="768004564"/>
+                    </a:ext>
+                  </a:extLst>
+                </a:gridCol>
+                <a:gridCol w="6041520">
+                  <a:extLst>
+                    <a:ext uri="{9D8B030D-6E8A-4147-A177-3AD203B41FA5}">
+                      <a16:colId xmlns:a16="http://schemas.microsoft.com/office/drawing/2014/main" val="2476489099"/>
+                    </a:ext>
+                  </a:extLst>
+                </a:gridCol>
+              </a:tblGrid>
+              <a:tr h="653802">
+                <a:tc>
+                  <a:txBody>
+                    <a:bodyPr/>
+                    <a:lstStyle/>
+                    <a:p>
+                      <a:pPr algn="ctr"/>
+                      <a:r>
+                        <a:rPr lang="ru-RU" sz="1400" b="0" dirty="0">
+                          <a:latin typeface="Times New Roman" panose="02020603050405020304" pitchFamily="18" charset="0"/>
+                          <a:cs typeface="Times New Roman" panose="02020603050405020304" pitchFamily="18" charset="0"/>
+                        </a:rPr>
+                        <a:t>Виды деятельности:</a:t>
                       </a:r>
                     </a:p>
+                  </a:txBody>
+                  <a:tcPr/>
+                </a:tc>
+                <a:tc>
+                  <a:txBody>
+                    <a:bodyPr/>
+                    <a:lstStyle/>
                     <a:p>
-                      <a:pPr marL="0" marR="165100" lvl="0" indent="0" algn="just" defTabSz="914400" rtl="0" eaLnBrk="1" fontAlgn="auto" latinLnBrk="0" hangingPunct="1">
+                      <a:pPr marL="0" marR="0" lvl="0" indent="0" algn="ctr" defTabSz="914400" rtl="0" eaLnBrk="1" fontAlgn="auto" latinLnBrk="0" hangingPunct="1">
                         <a:lnSpc>
                           <a:spcPct val="100000"/>
                         </a:lnSpc>
@@ -6892,23 +6850,144 @@
                         </a:spcAft>
                         <a:buClrTx/>
                         <a:buSzTx/>
-                        <a:buFont typeface="Symbol" panose="05050102010706020507" pitchFamily="18" charset="2"/>
+                        <a:buFontTx/>
                         <a:buNone/>
                         <a:tabLst/>
                         <a:defRPr/>
                       </a:pPr>
                       <a:r>
-                        <a:rPr lang="ru-RU" sz="1400" kern="1200" dirty="0">
+                        <a:rPr lang="ru-RU" sz="1400" b="0" dirty="0">
+                          <a:solidFill>
+                            <a:schemeClr val="bg1"/>
+                          </a:solidFill>
+                          <a:effectLst/>
+                          <a:latin typeface="Times New Roman" panose="02020603050405020304" pitchFamily="18" charset="0"/>
+                          <a:ea typeface="Times New Roman" panose="02020603050405020304" pitchFamily="18" charset="0"/>
+                          <a:cs typeface="Times New Roman" panose="02020603050405020304" pitchFamily="18" charset="0"/>
+                        </a:rPr>
+                        <a:t>Функциональные задачи программного продукта:</a:t>
+                      </a:r>
+                      <a:endParaRPr lang="ru-RU" sz="1400" b="0" dirty="0">
+                        <a:solidFill>
+                          <a:schemeClr val="bg1"/>
+                        </a:solidFill>
+                        <a:effectLst/>
+                        <a:highlight>
+                          <a:srgbClr val="FFFF00"/>
+                        </a:highlight>
+                        <a:latin typeface="Times New Roman" panose="02020603050405020304" pitchFamily="18" charset="0"/>
+                        <a:ea typeface="Times New Roman" panose="02020603050405020304" pitchFamily="18" charset="0"/>
+                        <a:cs typeface="Times New Roman" panose="02020603050405020304" pitchFamily="18" charset="0"/>
+                      </a:endParaRPr>
+                    </a:p>
+                    <a:p>
+                      <a:pPr algn="ctr"/>
+                      <a:endParaRPr lang="ru-RU" sz="1400" b="0" dirty="0">
+                        <a:latin typeface="Times New Roman" panose="02020603050405020304" pitchFamily="18" charset="0"/>
+                        <a:cs typeface="Times New Roman" panose="02020603050405020304" pitchFamily="18" charset="0"/>
+                      </a:endParaRPr>
+                    </a:p>
+                  </a:txBody>
+                  <a:tcPr/>
+                </a:tc>
+                <a:extLst>
+                  <a:ext uri="{0D108BD9-81ED-4DB2-BD59-A6C34878D82A}">
+                    <a16:rowId xmlns:a16="http://schemas.microsoft.com/office/drawing/2014/main" val="189619887"/>
+                  </a:ext>
+                </a:extLst>
+              </a:tr>
+              <a:tr h="653802">
+                <a:tc>
+                  <a:txBody>
+                    <a:bodyPr/>
+                    <a:lstStyle/>
+                    <a:p>
+                      <a:pPr marL="0" algn="l" defTabSz="914400" rtl="0" eaLnBrk="1" latinLnBrk="0" hangingPunct="1"/>
+                      <a:r>
+                        <a:rPr lang="ru-RU" sz="1400" b="0" i="0" kern="1200" dirty="0">
                           <a:solidFill>
                             <a:schemeClr val="dk1"/>
                           </a:solidFill>
                           <a:effectLst/>
-                          <a:latin typeface="Arial" panose="020B0604020202020204" pitchFamily="34" charset="0"/>
-                          <a:cs typeface="Arial" panose="020B0604020202020204" pitchFamily="34" charset="0"/>
+                          <a:latin typeface="Times New Roman" panose="02020603050405020304" pitchFamily="18" charset="0"/>
+                          <a:ea typeface="+mn-ea"/>
+                          <a:cs typeface="Times New Roman" panose="02020603050405020304" pitchFamily="18" charset="0"/>
                         </a:rPr>
-                        <a:t>текст</a:t>
+                        <a:t>Проведён анализ предметной области</a:t>
+                      </a:r>
+                      <a:endParaRPr lang="ru-RU" sz="1400" b="0" dirty="0">
+                        <a:latin typeface="Times New Roman" panose="02020603050405020304" pitchFamily="18" charset="0"/>
+                        <a:cs typeface="Times New Roman" panose="02020603050405020304" pitchFamily="18" charset="0"/>
+                      </a:endParaRPr>
+                    </a:p>
+                  </a:txBody>
+                  <a:tcPr anchor="ctr"/>
+                </a:tc>
+                <a:tc>
+                  <a:txBody>
+                    <a:bodyPr/>
+                    <a:lstStyle/>
+                    <a:p>
+                      <a:pPr marL="0" marR="165100" lvl="0" indent="0" algn="just" defTabSz="914400" rtl="0" eaLnBrk="1" latinLnBrk="0" hangingPunct="1">
+                        <a:spcAft>
+                          <a:spcPts val="0"/>
+                        </a:spcAft>
+                        <a:buFont typeface="Symbol" panose="05050102010706020507" pitchFamily="18" charset="2"/>
+                        <a:buNone/>
+                      </a:pPr>
+                      <a:r>
+                        <a:rPr lang="ru-RU" sz="1400" b="0" i="0" kern="1200" dirty="0">
+                          <a:solidFill>
+                            <a:schemeClr val="dk1"/>
+                          </a:solidFill>
+                          <a:effectLst/>
+                          <a:latin typeface="Times New Roman" panose="02020603050405020304" pitchFamily="18" charset="0"/>
+                          <a:ea typeface="+mn-ea"/>
+                          <a:cs typeface="Times New Roman" panose="02020603050405020304" pitchFamily="18" charset="0"/>
+                        </a:rPr>
+                        <a:t>Определены объекты (Фильм, Зал, Сеанс, Место, Билет, Пользователь), их атрибуты и связи. Выявлены роли: администратор, менеджер, клиент.</a:t>
                       </a:r>
                     </a:p>
+                  </a:txBody>
+                  <a:tcPr anchor="ctr"/>
+                </a:tc>
+                <a:extLst>
+                  <a:ext uri="{0D108BD9-81ED-4DB2-BD59-A6C34878D82A}">
+                    <a16:rowId xmlns:a16="http://schemas.microsoft.com/office/drawing/2014/main" val="3534808504"/>
+                  </a:ext>
+                </a:extLst>
+              </a:tr>
+              <a:tr h="467917">
+                <a:tc>
+                  <a:txBody>
+                    <a:bodyPr/>
+                    <a:lstStyle/>
+                    <a:p>
+                      <a:pPr marL="0" algn="l" defTabSz="914400" rtl="0" eaLnBrk="1" latinLnBrk="0" hangingPunct="1"/>
+                      <a:r>
+                        <a:rPr lang="ru-RU" sz="1400" b="0" i="0" kern="1200" dirty="0">
+                          <a:solidFill>
+                            <a:schemeClr val="dk1"/>
+                          </a:solidFill>
+                          <a:effectLst/>
+                          <a:latin typeface="Times New Roman" panose="02020603050405020304" pitchFamily="18" charset="0"/>
+                          <a:ea typeface="+mn-ea"/>
+                          <a:cs typeface="Times New Roman" panose="02020603050405020304" pitchFamily="18" charset="0"/>
+                        </a:rPr>
+                        <a:t>Выбраны и обоснованы инструменты реализации</a:t>
+                      </a:r>
+                      <a:endParaRPr lang="ru-RU" sz="1400" b="0" dirty="0">
+                        <a:latin typeface="Times New Roman" panose="02020603050405020304" pitchFamily="18" charset="0"/>
+                        <a:cs typeface="Times New Roman" panose="02020603050405020304" pitchFamily="18" charset="0"/>
+                      </a:endParaRPr>
+                    </a:p>
+                  </a:txBody>
+                  <a:tcPr anchor="ctr"/>
+                </a:tc>
+                <a:tc>
+                  <a:txBody>
+                    <a:bodyPr/>
+                    <a:lstStyle/>
                     <a:p>
                       <a:pPr marL="0" marR="165100" lvl="0" indent="0" algn="just">
                         <a:spcAft>
@@ -6918,24 +6997,554 @@
                         <a:buNone/>
                       </a:pPr>
                       <a:r>
-                        <a:rPr lang="ru-RU" sz="1400" kern="1200" dirty="0">
+                        <a:rPr lang="en-US" sz="1400" b="0" i="0" kern="1200" dirty="0">
                           <a:solidFill>
                             <a:schemeClr val="dk1"/>
                           </a:solidFill>
                           <a:effectLst/>
-                          <a:latin typeface="Arial" panose="020B0604020202020204" pitchFamily="34" charset="0"/>
-                          <a:ea typeface="Times New Roman" panose="02020603050405020304" pitchFamily="18" charset="0"/>
-                          <a:cs typeface="Arial" panose="020B0604020202020204" pitchFamily="34" charset="0"/>
+                          <a:latin typeface="Times New Roman" panose="02020603050405020304" pitchFamily="18" charset="0"/>
+                          <a:ea typeface="+mn-ea"/>
+                          <a:cs typeface="Times New Roman" panose="02020603050405020304" pitchFamily="18" charset="0"/>
                         </a:rPr>
-                        <a:t>..</a:t>
+                        <a:t>Python, Django, PostgreSQL, </a:t>
+                      </a:r>
+                      <a:r>
+                        <a:rPr lang="en-US" sz="1400" b="0" i="0" kern="1200" dirty="0" err="1">
+                          <a:solidFill>
+                            <a:schemeClr val="dk1"/>
+                          </a:solidFill>
+                          <a:effectLst/>
+                          <a:latin typeface="Times New Roman" panose="02020603050405020304" pitchFamily="18" charset="0"/>
+                          <a:ea typeface="+mn-ea"/>
+                          <a:cs typeface="Times New Roman" panose="02020603050405020304" pitchFamily="18" charset="0"/>
+                        </a:rPr>
+                        <a:t>YooKassa</a:t>
+                      </a:r>
+                      <a:r>
+                        <a:rPr lang="en-US" sz="1400" b="0" i="0" kern="1200" dirty="0">
+                          <a:solidFill>
+                            <a:schemeClr val="dk1"/>
+                          </a:solidFill>
+                          <a:effectLst/>
+                          <a:latin typeface="Times New Roman" panose="02020603050405020304" pitchFamily="18" charset="0"/>
+                          <a:ea typeface="+mn-ea"/>
+                          <a:cs typeface="Times New Roman" panose="02020603050405020304" pitchFamily="18" charset="0"/>
+                        </a:rPr>
+                        <a:t>, </a:t>
+                      </a:r>
+                      <a:r>
+                        <a:rPr lang="en-US" sz="1400" b="0" i="0" kern="1200" dirty="0" err="1">
+                          <a:solidFill>
+                            <a:schemeClr val="dk1"/>
+                          </a:solidFill>
+                          <a:effectLst/>
+                          <a:latin typeface="Times New Roman" panose="02020603050405020304" pitchFamily="18" charset="0"/>
+                          <a:ea typeface="+mn-ea"/>
+                          <a:cs typeface="Times New Roman" panose="02020603050405020304" pitchFamily="18" charset="0"/>
+                          <a:hlinkClick r:id="rId3">
+                            <a:extLst>
+                              <a:ext uri="{A12FA001-AC4F-418D-AE19-62706E023703}">
+                                <ahyp:hlinkClr xmlns:ahyp="http://schemas.microsoft.com/office/drawing/2018/hyperlinkcolor" val="tx"/>
+                              </a:ext>
+                            </a:extLst>
+                          </a:hlinkClick>
+                        </a:rPr>
+                        <a:t>Poiskkino.dev</a:t>
+                      </a:r>
+                      <a:r>
+                        <a:rPr lang="en-US" sz="1400" b="0" i="0" kern="1200" dirty="0">
+                          <a:solidFill>
+                            <a:schemeClr val="dk1"/>
+                          </a:solidFill>
+                          <a:effectLst/>
+                          <a:latin typeface="Times New Roman" panose="02020603050405020304" pitchFamily="18" charset="0"/>
+                          <a:ea typeface="+mn-ea"/>
+                          <a:cs typeface="Times New Roman" panose="02020603050405020304" pitchFamily="18" charset="0"/>
+                        </a:rPr>
+                        <a:t> API, HTML5, CSS3, </a:t>
+                      </a:r>
+                      <a:r>
+                        <a:rPr lang="en-US" sz="1400" b="0" i="0" kern="1200" dirty="0" err="1">
+                          <a:solidFill>
+                            <a:schemeClr val="dk1"/>
+                          </a:solidFill>
+                          <a:effectLst/>
+                          <a:latin typeface="Times New Roman" panose="02020603050405020304" pitchFamily="18" charset="0"/>
+                          <a:ea typeface="+mn-ea"/>
+                          <a:cs typeface="Times New Roman" panose="02020603050405020304" pitchFamily="18" charset="0"/>
+                        </a:rPr>
+                        <a:t>pytest</a:t>
+                      </a:r>
+                      <a:r>
+                        <a:rPr lang="en-US" sz="1400" b="0" i="0" kern="1200" dirty="0">
+                          <a:solidFill>
+                            <a:schemeClr val="dk1"/>
+                          </a:solidFill>
+                          <a:effectLst/>
+                          <a:latin typeface="Times New Roman" panose="02020603050405020304" pitchFamily="18" charset="0"/>
+                          <a:ea typeface="+mn-ea"/>
+                          <a:cs typeface="Times New Roman" panose="02020603050405020304" pitchFamily="18" charset="0"/>
+                        </a:rPr>
+                        <a:t>.</a:t>
+                      </a:r>
+                      <a:endParaRPr lang="ru-RU" sz="1400" b="0" i="0" kern="1200" dirty="0">
+                        <a:solidFill>
+                          <a:schemeClr val="dk1"/>
+                        </a:solidFill>
+                        <a:effectLst/>
+                        <a:latin typeface="Times New Roman" panose="02020603050405020304" pitchFamily="18" charset="0"/>
+                        <a:ea typeface="+mn-ea"/>
+                        <a:cs typeface="Times New Roman" panose="02020603050405020304" pitchFamily="18" charset="0"/>
+                      </a:endParaRPr>
+                    </a:p>
+                  </a:txBody>
+                  <a:tcPr anchor="ctr"/>
+                </a:tc>
+                <a:extLst>
+                  <a:ext uri="{0D108BD9-81ED-4DB2-BD59-A6C34878D82A}">
+                    <a16:rowId xmlns:a16="http://schemas.microsoft.com/office/drawing/2014/main" val="3560326122"/>
+                  </a:ext>
+                </a:extLst>
+              </a:tr>
+              <a:tr h="653802">
+                <a:tc>
+                  <a:txBody>
+                    <a:bodyPr/>
+                    <a:lstStyle/>
+                    <a:p>
+                      <a:pPr marL="0" algn="l" defTabSz="914400" rtl="0" eaLnBrk="1" latinLnBrk="0" hangingPunct="1"/>
+                      <a:r>
+                        <a:rPr lang="ru-RU" sz="1400" b="0" i="0" kern="1200" dirty="0">
+                          <a:solidFill>
+                            <a:schemeClr val="dk1"/>
+                          </a:solidFill>
+                          <a:effectLst/>
+                          <a:latin typeface="Times New Roman" panose="02020603050405020304" pitchFamily="18" charset="0"/>
+                          <a:ea typeface="+mn-ea"/>
+                          <a:cs typeface="Times New Roman" panose="02020603050405020304" pitchFamily="18" charset="0"/>
+                        </a:rPr>
+                        <a:t>Составлено техническое задание по ГОСТ 34.602-2020</a:t>
+                      </a:r>
+                      <a:endParaRPr lang="ru-RU" sz="1400" b="0" dirty="0">
+                        <a:latin typeface="Times New Roman" panose="02020603050405020304" pitchFamily="18" charset="0"/>
+                        <a:cs typeface="Times New Roman" panose="02020603050405020304" pitchFamily="18" charset="0"/>
+                      </a:endParaRPr>
+                    </a:p>
+                  </a:txBody>
+                  <a:tcPr anchor="ctr"/>
+                </a:tc>
+                <a:tc>
+                  <a:txBody>
+                    <a:bodyPr/>
+                    <a:lstStyle/>
+                    <a:p>
+                      <a:pPr marL="0" marR="165100" lvl="0" indent="0" algn="just">
+                        <a:spcAft>
+                          <a:spcPts val="0"/>
+                        </a:spcAft>
+                        <a:buFont typeface="Symbol" panose="05050102010706020507" pitchFamily="18" charset="2"/>
+                        <a:buNone/>
+                      </a:pPr>
+                      <a:r>
+                        <a:rPr lang="ru-RU" sz="1400" b="0" i="0" kern="1200" dirty="0">
+                          <a:solidFill>
+                            <a:schemeClr val="dk1"/>
+                          </a:solidFill>
+                          <a:effectLst/>
+                          <a:latin typeface="Times New Roman" panose="02020603050405020304" pitchFamily="18" charset="0"/>
+                          <a:ea typeface="+mn-ea"/>
+                          <a:cs typeface="Times New Roman" panose="02020603050405020304" pitchFamily="18" charset="0"/>
+                        </a:rPr>
+                        <a:t>Отражены функциональные требования, требования к ПО, безопасности и тестированию.</a:t>
                       </a:r>
                     </a:p>
                   </a:txBody>
-                  <a:tcPr/>
+                  <a:tcPr anchor="ctr"/>
+                </a:tc>
+                <a:extLst>
+                  <a:ext uri="{0D108BD9-81ED-4DB2-BD59-A6C34878D82A}">
+                    <a16:rowId xmlns:a16="http://schemas.microsoft.com/office/drawing/2014/main" val="615231817"/>
+                  </a:ext>
+                </a:extLst>
+              </a:tr>
+              <a:tr h="1461437">
+                <a:tc>
+                  <a:txBody>
+                    <a:bodyPr/>
+                    <a:lstStyle/>
+                    <a:p>
+                      <a:pPr marL="0" algn="l" defTabSz="914400" rtl="0" eaLnBrk="1" latinLnBrk="0" hangingPunct="1"/>
+                      <a:r>
+                        <a:rPr lang="ru-RU" sz="1400" b="0" i="0" kern="1200" dirty="0">
+                          <a:solidFill>
+                            <a:schemeClr val="dk1"/>
+                          </a:solidFill>
+                          <a:effectLst/>
+                          <a:latin typeface="Times New Roman" panose="02020603050405020304" pitchFamily="18" charset="0"/>
+                          <a:ea typeface="+mn-ea"/>
+                          <a:cs typeface="Times New Roman" panose="02020603050405020304" pitchFamily="18" charset="0"/>
+                        </a:rPr>
+                        <a:t>Выполнено проектирование</a:t>
+                      </a:r>
+                      <a:endParaRPr lang="ru-RU" sz="1400" b="0" kern="1200" dirty="0">
+                        <a:solidFill>
+                          <a:schemeClr val="dk1"/>
+                        </a:solidFill>
+                        <a:latin typeface="Times New Roman" panose="02020603050405020304" pitchFamily="18" charset="0"/>
+                        <a:ea typeface="+mn-ea"/>
+                        <a:cs typeface="Times New Roman" panose="02020603050405020304" pitchFamily="18" charset="0"/>
+                      </a:endParaRPr>
+                    </a:p>
+                  </a:txBody>
+                  <a:tcPr anchor="ctr"/>
+                </a:tc>
+                <a:tc>
+                  <a:txBody>
+                    <a:bodyPr/>
+                    <a:lstStyle/>
+                    <a:p>
+                      <a:pPr marL="0" lvl="1" indent="0" algn="l"/>
+                      <a:r>
+                        <a:rPr lang="ru-RU" sz="1400" b="0" i="0" kern="1200" dirty="0">
+                          <a:solidFill>
+                            <a:schemeClr val="dk1"/>
+                          </a:solidFill>
+                          <a:effectLst/>
+                          <a:latin typeface="Times New Roman" panose="02020603050405020304" pitchFamily="18" charset="0"/>
+                          <a:ea typeface="+mn-ea"/>
+                          <a:cs typeface="Times New Roman" panose="02020603050405020304" pitchFamily="18" charset="0"/>
+                        </a:rPr>
+                        <a:t>Разработана архитектура клиент-серверного веб-приложения с использованием шаблона MVT. Построены диаграммы </a:t>
+                      </a:r>
+                      <a:r>
+                        <a:rPr lang="ru-RU" sz="1400" b="0" i="0" kern="1200" dirty="0" err="1">
+                          <a:solidFill>
+                            <a:schemeClr val="dk1"/>
+                          </a:solidFill>
+                          <a:effectLst/>
+                          <a:latin typeface="Times New Roman" panose="02020603050405020304" pitchFamily="18" charset="0"/>
+                          <a:ea typeface="+mn-ea"/>
+                          <a:cs typeface="Times New Roman" panose="02020603050405020304" pitchFamily="18" charset="0"/>
+                        </a:rPr>
+                        <a:t>Use</a:t>
+                      </a:r>
+                      <a:r>
+                        <a:rPr lang="ru-RU" sz="1400" b="0" i="0" kern="1200" dirty="0">
+                          <a:solidFill>
+                            <a:schemeClr val="dk1"/>
+                          </a:solidFill>
+                          <a:effectLst/>
+                          <a:latin typeface="Times New Roman" panose="02020603050405020304" pitchFamily="18" charset="0"/>
+                          <a:ea typeface="+mn-ea"/>
+                          <a:cs typeface="Times New Roman" panose="02020603050405020304" pitchFamily="18" charset="0"/>
+                        </a:rPr>
+                        <a:t> </a:t>
+                      </a:r>
+                      <a:r>
+                        <a:rPr lang="ru-RU" sz="1400" b="0" i="0" kern="1200" dirty="0" err="1">
+                          <a:solidFill>
+                            <a:schemeClr val="dk1"/>
+                          </a:solidFill>
+                          <a:effectLst/>
+                          <a:latin typeface="Times New Roman" panose="02020603050405020304" pitchFamily="18" charset="0"/>
+                          <a:ea typeface="+mn-ea"/>
+                          <a:cs typeface="Times New Roman" panose="02020603050405020304" pitchFamily="18" charset="0"/>
+                        </a:rPr>
+                        <a:t>Case</a:t>
+                      </a:r>
+                      <a:r>
+                        <a:rPr lang="ru-RU" sz="1400" b="0" i="0" kern="1200" dirty="0">
+                          <a:solidFill>
+                            <a:schemeClr val="dk1"/>
+                          </a:solidFill>
+                          <a:effectLst/>
+                          <a:latin typeface="Times New Roman" panose="02020603050405020304" pitchFamily="18" charset="0"/>
+                          <a:ea typeface="+mn-ea"/>
+                          <a:cs typeface="Times New Roman" panose="02020603050405020304" pitchFamily="18" charset="0"/>
+                        </a:rPr>
+                        <a:t> и DFD. Спроектирована база данных (27 таблиц, 3НФ, ER-модель). Созданы прототипы 13 окон пользовательского интерфейса.</a:t>
+                      </a:r>
+                    </a:p>
+                  </a:txBody>
+                  <a:tcPr anchor="ctr"/>
+                </a:tc>
+                <a:extLst>
+                  <a:ext uri="{0D108BD9-81ED-4DB2-BD59-A6C34878D82A}">
+                    <a16:rowId xmlns:a16="http://schemas.microsoft.com/office/drawing/2014/main" val="1226676623"/>
+                  </a:ext>
+                </a:extLst>
+              </a:tr>
+              <a:tr h="653802">
+                <a:tc>
+                  <a:txBody>
+                    <a:bodyPr/>
+                    <a:lstStyle/>
+                    <a:p>
+                      <a:pPr marL="0" algn="l" defTabSz="914400" rtl="0" eaLnBrk="1" latinLnBrk="0" hangingPunct="1"/>
+                      <a:r>
+                        <a:rPr lang="ru-RU" sz="1400" b="0" i="0" kern="1200" dirty="0">
+                          <a:solidFill>
+                            <a:schemeClr val="dk1"/>
+                          </a:solidFill>
+                          <a:effectLst/>
+                          <a:latin typeface="Times New Roman" panose="02020603050405020304" pitchFamily="18" charset="0"/>
+                          <a:ea typeface="+mn-ea"/>
+                          <a:cs typeface="Times New Roman" panose="02020603050405020304" pitchFamily="18" charset="0"/>
+                        </a:rPr>
+                        <a:t>Разработан программный продукт</a:t>
+                      </a:r>
+                      <a:endParaRPr lang="ru-RU" sz="1400" b="0" kern="1200" dirty="0">
+                        <a:solidFill>
+                          <a:schemeClr val="dk1"/>
+                        </a:solidFill>
+                        <a:latin typeface="Times New Roman" panose="02020603050405020304" pitchFamily="18" charset="0"/>
+                        <a:ea typeface="+mn-ea"/>
+                        <a:cs typeface="Times New Roman" panose="02020603050405020304" pitchFamily="18" charset="0"/>
+                      </a:endParaRPr>
+                    </a:p>
+                  </a:txBody>
+                  <a:tcPr anchor="ctr"/>
+                </a:tc>
+                <a:tc>
+                  <a:txBody>
+                    <a:bodyPr/>
+                    <a:lstStyle/>
+                    <a:p>
+                      <a:pPr marL="0" marR="165100" lvl="0" indent="0" algn="just">
+                        <a:spcAft>
+                          <a:spcPts val="0"/>
+                        </a:spcAft>
+                        <a:buFont typeface="Symbol" panose="05050102010706020507" pitchFamily="18" charset="2"/>
+                        <a:buNone/>
+                      </a:pPr>
+                      <a:r>
+                        <a:rPr lang="ru-RU" sz="1400" b="0" i="0" kern="1200" dirty="0">
+                          <a:solidFill>
+                            <a:schemeClr val="dk1"/>
+                          </a:solidFill>
+                          <a:effectLst/>
+                          <a:latin typeface="Times New Roman" panose="02020603050405020304" pitchFamily="18" charset="0"/>
+                          <a:ea typeface="+mn-ea"/>
+                          <a:cs typeface="Times New Roman" panose="02020603050405020304" pitchFamily="18" charset="0"/>
+                        </a:rPr>
+                        <a:t>Веб-приложение «Кинотеатр» с полным циклом бронирования билетов, онлайн-оплатой через </a:t>
+                      </a:r>
+                      <a:r>
+                        <a:rPr lang="ru-RU" sz="1400" b="0" i="0" kern="1200" dirty="0" err="1">
+                          <a:solidFill>
+                            <a:schemeClr val="dk1"/>
+                          </a:solidFill>
+                          <a:effectLst/>
+                          <a:latin typeface="Times New Roman" panose="02020603050405020304" pitchFamily="18" charset="0"/>
+                          <a:ea typeface="+mn-ea"/>
+                          <a:cs typeface="Times New Roman" panose="02020603050405020304" pitchFamily="18" charset="0"/>
+                        </a:rPr>
+                        <a:t>YooKassa</a:t>
+                      </a:r>
+                      <a:r>
+                        <a:rPr lang="ru-RU" sz="1400" b="0" i="0" kern="1200" dirty="0">
+                          <a:solidFill>
+                            <a:schemeClr val="dk1"/>
+                          </a:solidFill>
+                          <a:effectLst/>
+                          <a:latin typeface="Times New Roman" panose="02020603050405020304" pitchFamily="18" charset="0"/>
+                          <a:ea typeface="+mn-ea"/>
+                          <a:cs typeface="Times New Roman" panose="02020603050405020304" pitchFamily="18" charset="0"/>
+                        </a:rPr>
+                        <a:t>, генерацией PDF-билетов с QR-кодом, импортом фильмов из API </a:t>
+                      </a:r>
+                      <a:r>
+                        <a:rPr lang="ru-RU" sz="1400" b="0" i="0" kern="1200" dirty="0" err="1">
+                          <a:solidFill>
+                            <a:schemeClr val="dk1"/>
+                          </a:solidFill>
+                          <a:effectLst/>
+                          <a:latin typeface="Times New Roman" panose="02020603050405020304" pitchFamily="18" charset="0"/>
+                          <a:ea typeface="+mn-ea"/>
+                          <a:cs typeface="Times New Roman" panose="02020603050405020304" pitchFamily="18" charset="0"/>
+                          <a:hlinkClick r:id="rId3">
+                            <a:extLst>
+                              <a:ext uri="{A12FA001-AC4F-418D-AE19-62706E023703}">
+                                <ahyp:hlinkClr xmlns:ahyp="http://schemas.microsoft.com/office/drawing/2018/hyperlinkcolor" val="tx"/>
+                              </a:ext>
+                            </a:extLst>
+                          </a:hlinkClick>
+                        </a:rPr>
+                        <a:t>Poiskkino.dev</a:t>
+                      </a:r>
+                      <a:r>
+                        <a:rPr lang="ru-RU" sz="1400" b="0" i="0" kern="1200" dirty="0">
+                          <a:solidFill>
+                            <a:schemeClr val="dk1"/>
+                          </a:solidFill>
+                          <a:effectLst/>
+                          <a:latin typeface="Times New Roman" panose="02020603050405020304" pitchFamily="18" charset="0"/>
+                          <a:ea typeface="+mn-ea"/>
+                          <a:cs typeface="Times New Roman" panose="02020603050405020304" pitchFamily="18" charset="0"/>
+                        </a:rPr>
+                        <a:t>.</a:t>
+                      </a:r>
+                    </a:p>
+                  </a:txBody>
+                  <a:tcPr anchor="ctr"/>
                 </a:tc>
                 <a:extLst>
                   <a:ext uri="{0D108BD9-81ED-4DB2-BD59-A6C34878D82A}">
                     <a16:rowId xmlns:a16="http://schemas.microsoft.com/office/drawing/2014/main" val="1084815917"/>
+                  </a:ext>
+                </a:extLst>
+              </a:tr>
+              <a:tr h="653802">
+                <a:tc>
+                  <a:txBody>
+                    <a:bodyPr/>
+                    <a:lstStyle/>
+                    <a:p>
+                      <a:pPr marL="0" algn="l" defTabSz="914400" rtl="0" eaLnBrk="1" latinLnBrk="0" hangingPunct="1"/>
+                      <a:r>
+                        <a:rPr lang="ru-RU" sz="1400" b="0" i="0" kern="1200" dirty="0">
+                          <a:solidFill>
+                            <a:schemeClr val="dk1"/>
+                          </a:solidFill>
+                          <a:effectLst/>
+                          <a:latin typeface="Times New Roman" panose="02020603050405020304" pitchFamily="18" charset="0"/>
+                          <a:ea typeface="+mn-ea"/>
+                          <a:cs typeface="Times New Roman" panose="02020603050405020304" pitchFamily="18" charset="0"/>
+                        </a:rPr>
+                        <a:t>Проведено тестирование</a:t>
+                      </a:r>
+                      <a:endParaRPr lang="ru-RU" sz="1400" b="0" kern="1200" dirty="0">
+                        <a:solidFill>
+                          <a:schemeClr val="dk1"/>
+                        </a:solidFill>
+                        <a:latin typeface="Times New Roman" panose="02020603050405020304" pitchFamily="18" charset="0"/>
+                        <a:ea typeface="+mn-ea"/>
+                        <a:cs typeface="Times New Roman" panose="02020603050405020304" pitchFamily="18" charset="0"/>
+                      </a:endParaRPr>
+                    </a:p>
+                  </a:txBody>
+                  <a:tcPr anchor="ctr"/>
+                </a:tc>
+                <a:tc>
+                  <a:txBody>
+                    <a:bodyPr/>
+                    <a:lstStyle/>
+                    <a:p>
+                      <a:pPr marL="0" marR="165100" lvl="0" indent="0" algn="just">
+                        <a:spcAft>
+                          <a:spcPts val="0"/>
+                        </a:spcAft>
+                        <a:buFont typeface="Symbol" panose="05050102010706020507" pitchFamily="18" charset="2"/>
+                        <a:buNone/>
+                      </a:pPr>
+                      <a:r>
+                        <a:rPr lang="ru-RU" sz="1400" b="0" i="0" kern="1200" dirty="0">
+                          <a:solidFill>
+                            <a:schemeClr val="dk1"/>
+                          </a:solidFill>
+                          <a:effectLst/>
+                          <a:latin typeface="Times New Roman" panose="02020603050405020304" pitchFamily="18" charset="0"/>
+                          <a:ea typeface="+mn-ea"/>
+                          <a:cs typeface="Times New Roman" panose="02020603050405020304" pitchFamily="18" charset="0"/>
+                        </a:rPr>
+                        <a:t>7 сценариев (6 функциональных + 1 GUI). Все сценарии выполнены успешно. Использован </a:t>
+                      </a:r>
+                      <a:r>
+                        <a:rPr lang="ru-RU" sz="1400" b="0" i="0" kern="1200" dirty="0" err="1">
+                          <a:solidFill>
+                            <a:schemeClr val="dk1"/>
+                          </a:solidFill>
+                          <a:effectLst/>
+                          <a:latin typeface="Times New Roman" panose="02020603050405020304" pitchFamily="18" charset="0"/>
+                          <a:ea typeface="+mn-ea"/>
+                          <a:cs typeface="Times New Roman" panose="02020603050405020304" pitchFamily="18" charset="0"/>
+                        </a:rPr>
+                        <a:t>pytest</a:t>
+                      </a:r>
+                      <a:r>
+                        <a:rPr lang="ru-RU" sz="1400" b="0" i="0" kern="1200" dirty="0">
+                          <a:solidFill>
+                            <a:schemeClr val="dk1"/>
+                          </a:solidFill>
+                          <a:effectLst/>
+                          <a:latin typeface="Times New Roman" panose="02020603050405020304" pitchFamily="18" charset="0"/>
+                          <a:ea typeface="+mn-ea"/>
+                          <a:cs typeface="Times New Roman" panose="02020603050405020304" pitchFamily="18" charset="0"/>
+                        </a:rPr>
+                        <a:t>.</a:t>
+                      </a:r>
+                    </a:p>
+                  </a:txBody>
+                  <a:tcPr anchor="ctr"/>
+                </a:tc>
+                <a:extLst>
+                  <a:ext uri="{0D108BD9-81ED-4DB2-BD59-A6C34878D82A}">
+                    <a16:rowId xmlns:a16="http://schemas.microsoft.com/office/drawing/2014/main" val="1232857548"/>
+                  </a:ext>
+                </a:extLst>
+              </a:tr>
+              <a:tr h="653802">
+                <a:tc>
+                  <a:txBody>
+                    <a:bodyPr/>
+                    <a:lstStyle/>
+                    <a:p>
+                      <a:pPr marL="0" algn="l" defTabSz="914400" rtl="0" eaLnBrk="1" latinLnBrk="0" hangingPunct="1"/>
+                      <a:r>
+                        <a:rPr lang="ru-RU" sz="1400" b="0" i="0" kern="1200" dirty="0">
+                          <a:solidFill>
+                            <a:schemeClr val="dk1"/>
+                          </a:solidFill>
+                          <a:effectLst/>
+                          <a:latin typeface="Times New Roman" panose="02020603050405020304" pitchFamily="18" charset="0"/>
+                          <a:ea typeface="+mn-ea"/>
+                          <a:cs typeface="Times New Roman" panose="02020603050405020304" pitchFamily="18" charset="0"/>
+                        </a:rPr>
+                        <a:t>Разработана документация</a:t>
+                      </a:r>
+                      <a:endParaRPr lang="ru-RU" sz="1400" b="0" kern="1200" dirty="0">
+                        <a:solidFill>
+                          <a:schemeClr val="dk1"/>
+                        </a:solidFill>
+                        <a:latin typeface="Times New Roman" panose="02020603050405020304" pitchFamily="18" charset="0"/>
+                        <a:ea typeface="+mn-ea"/>
+                        <a:cs typeface="Times New Roman" panose="02020603050405020304" pitchFamily="18" charset="0"/>
+                      </a:endParaRPr>
+                    </a:p>
+                  </a:txBody>
+                  <a:tcPr anchor="ctr"/>
+                </a:tc>
+                <a:tc>
+                  <a:txBody>
+                    <a:bodyPr/>
+                    <a:lstStyle/>
+                    <a:p>
+                      <a:pPr marL="0" marR="165100" lvl="0" indent="0" algn="just" defTabSz="914400" rtl="0" eaLnBrk="1" latinLnBrk="0" hangingPunct="1">
+                        <a:spcAft>
+                          <a:spcPts val="0"/>
+                        </a:spcAft>
+                        <a:buFont typeface="Symbol" panose="05050102010706020507" pitchFamily="18" charset="2"/>
+                        <a:buNone/>
+                      </a:pPr>
+                      <a:r>
+                        <a:rPr lang="ru-RU" sz="1400" b="0" i="0" kern="1200" dirty="0">
+                          <a:solidFill>
+                            <a:schemeClr val="dk1"/>
+                          </a:solidFill>
+                          <a:effectLst/>
+                          <a:latin typeface="Times New Roman" panose="02020603050405020304" pitchFamily="18" charset="0"/>
+                          <a:ea typeface="+mn-ea"/>
+                          <a:cs typeface="Times New Roman" panose="02020603050405020304" pitchFamily="18" charset="0"/>
+                        </a:rPr>
+                        <a:t>Пояснительная записка, руководство пользователя, руководство менеджера, руководство администратора, инструкция по установке и настройке.</a:t>
+                      </a:r>
+                    </a:p>
+                  </a:txBody>
+                  <a:tcPr anchor="ctr"/>
+                </a:tc>
+                <a:extLst>
+                  <a:ext uri="{0D108BD9-81ED-4DB2-BD59-A6C34878D82A}">
+                    <a16:rowId xmlns:a16="http://schemas.microsoft.com/office/drawing/2014/main" val="4187513944"/>
                   </a:ext>
                 </a:extLst>
               </a:tr>

--- a/Документация/Седых Владислав БД-22-1.pptx
+++ b/Документация/Седых Владислав БД-22-1.pptx
@@ -206,7 +206,7 @@
           <a:p>
             <a:fld id="{94389266-1B27-4525-B165-AD1A73342BE1}" type="datetimeFigureOut">
               <a:rPr lang="en-US" smtClean="0"/>
-              <a:t>6/2/2026</a:t>
+              <a:t>6/7/2026</a:t>
             </a:fld>
             <a:endParaRPr lang="en-US"/>
           </a:p>
@@ -2438,7 +2438,7 @@
           <a:p>
             <a:fld id="{DEA76DA3-B598-4B8A-8255-3391DDF783A7}" type="datetimeFigureOut">
               <a:rPr lang="ru-RU" smtClean="0"/>
-              <a:t>02.06.2026</a:t>
+              <a:t>07.06.2026</a:t>
             </a:fld>
             <a:endParaRPr lang="ru-RU"/>
           </a:p>
@@ -2636,7 +2636,7 @@
           <a:p>
             <a:fld id="{DEA76DA3-B598-4B8A-8255-3391DDF783A7}" type="datetimeFigureOut">
               <a:rPr lang="ru-RU" smtClean="0"/>
-              <a:t>02.06.2026</a:t>
+              <a:t>07.06.2026</a:t>
             </a:fld>
             <a:endParaRPr lang="ru-RU"/>
           </a:p>
@@ -2844,7 +2844,7 @@
           <a:p>
             <a:fld id="{DEA76DA3-B598-4B8A-8255-3391DDF783A7}" type="datetimeFigureOut">
               <a:rPr lang="ru-RU" smtClean="0"/>
-              <a:t>02.06.2026</a:t>
+              <a:t>07.06.2026</a:t>
             </a:fld>
             <a:endParaRPr lang="ru-RU"/>
           </a:p>
@@ -2951,7 +2951,7 @@
           <a:p>
             <a:fld id="{F93A723B-5719-4EEA-B777-EAF3DA7FDF21}" type="datetimeFigureOut">
               <a:rPr lang="ru-RU" smtClean="0"/>
-              <a:t>02.06.2026</a:t>
+              <a:t>07.06.2026</a:t>
             </a:fld>
             <a:endParaRPr lang="ru-RU"/>
           </a:p>
@@ -3217,7 +3217,7 @@
           <a:p>
             <a:fld id="{DEA76DA3-B598-4B8A-8255-3391DDF783A7}" type="datetimeFigureOut">
               <a:rPr lang="ru-RU" smtClean="0"/>
-              <a:t>02.06.2026</a:t>
+              <a:t>07.06.2026</a:t>
             </a:fld>
             <a:endParaRPr lang="ru-RU"/>
           </a:p>
@@ -3492,7 +3492,7 @@
           <a:p>
             <a:fld id="{DEA76DA3-B598-4B8A-8255-3391DDF783A7}" type="datetimeFigureOut">
               <a:rPr lang="ru-RU" smtClean="0"/>
-              <a:t>02.06.2026</a:t>
+              <a:t>07.06.2026</a:t>
             </a:fld>
             <a:endParaRPr lang="ru-RU"/>
           </a:p>
@@ -3757,7 +3757,7 @@
           <a:p>
             <a:fld id="{DEA76DA3-B598-4B8A-8255-3391DDF783A7}" type="datetimeFigureOut">
               <a:rPr lang="ru-RU" smtClean="0"/>
-              <a:t>02.06.2026</a:t>
+              <a:t>07.06.2026</a:t>
             </a:fld>
             <a:endParaRPr lang="ru-RU"/>
           </a:p>
@@ -4169,7 +4169,7 @@
           <a:p>
             <a:fld id="{DEA76DA3-B598-4B8A-8255-3391DDF783A7}" type="datetimeFigureOut">
               <a:rPr lang="ru-RU" smtClean="0"/>
-              <a:t>02.06.2026</a:t>
+              <a:t>07.06.2026</a:t>
             </a:fld>
             <a:endParaRPr lang="ru-RU"/>
           </a:p>
@@ -4310,7 +4310,7 @@
           <a:p>
             <a:fld id="{DEA76DA3-B598-4B8A-8255-3391DDF783A7}" type="datetimeFigureOut">
               <a:rPr lang="ru-RU" smtClean="0"/>
-              <a:t>02.06.2026</a:t>
+              <a:t>07.06.2026</a:t>
             </a:fld>
             <a:endParaRPr lang="ru-RU"/>
           </a:p>
@@ -4423,7 +4423,7 @@
           <a:p>
             <a:fld id="{DEA76DA3-B598-4B8A-8255-3391DDF783A7}" type="datetimeFigureOut">
               <a:rPr lang="ru-RU" smtClean="0"/>
-              <a:t>02.06.2026</a:t>
+              <a:t>07.06.2026</a:t>
             </a:fld>
             <a:endParaRPr lang="ru-RU"/>
           </a:p>
@@ -4734,7 +4734,7 @@
           <a:p>
             <a:fld id="{DEA76DA3-B598-4B8A-8255-3391DDF783A7}" type="datetimeFigureOut">
               <a:rPr lang="ru-RU" smtClean="0"/>
-              <a:t>02.06.2026</a:t>
+              <a:t>07.06.2026</a:t>
             </a:fld>
             <a:endParaRPr lang="ru-RU"/>
           </a:p>
@@ -5022,7 +5022,7 @@
           <a:p>
             <a:fld id="{DEA76DA3-B598-4B8A-8255-3391DDF783A7}" type="datetimeFigureOut">
               <a:rPr lang="ru-RU" smtClean="0"/>
-              <a:t>02.06.2026</a:t>
+              <a:t>07.06.2026</a:t>
             </a:fld>
             <a:endParaRPr lang="ru-RU"/>
           </a:p>
@@ -5263,7 +5263,7 @@
           <a:p>
             <a:fld id="{DEA76DA3-B598-4B8A-8255-3391DDF783A7}" type="datetimeFigureOut">
               <a:rPr lang="ru-RU" smtClean="0"/>
-              <a:t>02.06.2026</a:t>
+              <a:t>07.06.2026</a:t>
             </a:fld>
             <a:endParaRPr lang="ru-RU"/>
           </a:p>
@@ -10790,8 +10790,8 @@
         </p:nvSpPr>
         <p:spPr>
           <a:xfrm>
-            <a:off x="2627285" y="177119"/>
-            <a:ext cx="7189575" cy="1143000"/>
+            <a:off x="2592903" y="0"/>
+            <a:ext cx="7189575" cy="580445"/>
           </a:xfrm>
         </p:spPr>
         <p:txBody>
@@ -10830,7 +10830,7 @@
         </p:nvSpPr>
         <p:spPr>
           <a:xfrm>
-            <a:off x="2592903" y="983850"/>
+            <a:off x="5479227" y="380390"/>
             <a:ext cx="2424376" cy="400110"/>
           </a:xfrm>
           <a:prstGeom prst="rect">
@@ -10901,83 +10901,36 @@
           </a:p>
         </p:txBody>
       </p:sp>
-      <p:sp>
-        <p:nvSpPr>
-          <p:cNvPr id="12" name="TextBox 11">
-            <a:extLst>
-              <a:ext uri="{FF2B5EF4-FFF2-40B4-BE49-F238E27FC236}">
-                <a16:creationId xmlns:a16="http://schemas.microsoft.com/office/drawing/2014/main" id="{E9DCDD5E-167F-4D6F-BC5C-67653A818E66}"/>
-              </a:ext>
-            </a:extLst>
-          </p:cNvPr>
-          <p:cNvSpPr txBox="1"/>
-          <p:nvPr/>
-        </p:nvSpPr>
-        <p:spPr>
-          <a:xfrm>
-            <a:off x="7504965" y="3532935"/>
-            <a:ext cx="3796854" cy="400110"/>
-          </a:xfrm>
-          <a:prstGeom prst="rect">
-            <a:avLst/>
-          </a:prstGeom>
-          <a:noFill/>
-        </p:spPr>
-        <p:txBody>
-          <a:bodyPr wrap="square" rtlCol="0">
-            <a:spAutoFit/>
-          </a:bodyPr>
-          <a:lstStyle/>
-          <a:p>
-            <a:r>
-              <a:rPr lang="ru-RU" sz="2000" dirty="0">
-                <a:solidFill>
-                  <a:schemeClr val="accent1"/>
-                </a:solidFill>
-                <a:latin typeface="Arial" panose="020B0604020202020204" pitchFamily="34" charset="0"/>
-                <a:cs typeface="Arial" panose="020B0604020202020204" pitchFamily="34" charset="0"/>
-              </a:rPr>
-              <a:t>Нормализация (НФ):  </a:t>
-            </a:r>
-            <a:r>
-              <a:rPr lang="en-US" sz="2000" dirty="0">
-                <a:latin typeface="Arial" panose="020B0604020202020204" pitchFamily="34" charset="0"/>
-                <a:cs typeface="Arial" panose="020B0604020202020204" pitchFamily="34" charset="0"/>
-              </a:rPr>
-              <a:t>3 </a:t>
-            </a:r>
-            <a:r>
-              <a:rPr lang="ru-RU" sz="2000" dirty="0">
-                <a:latin typeface="Arial" panose="020B0604020202020204" pitchFamily="34" charset="0"/>
-                <a:cs typeface="Arial" panose="020B0604020202020204" pitchFamily="34" charset="0"/>
-              </a:rPr>
-              <a:t>НФ</a:t>
-            </a:r>
-          </a:p>
-        </p:txBody>
-      </p:sp>
       <p:pic>
         <p:nvPicPr>
-          <p:cNvPr id="16" name="Рисунок 15">
-            <a:extLst>
-              <a:ext uri="{FF2B5EF4-FFF2-40B4-BE49-F238E27FC236}">
-                <a16:creationId xmlns:a16="http://schemas.microsoft.com/office/drawing/2014/main" id="{50F443F5-FF48-416F-ADD9-5ED68A376F9D}"/>
-              </a:ext>
-            </a:extLst>
-          </p:cNvPr>
-          <p:cNvPicPr/>
+          <p:cNvPr id="6" name="Рисунок 5">
+            <a:extLst>
+              <a:ext uri="{FF2B5EF4-FFF2-40B4-BE49-F238E27FC236}">
+                <a16:creationId xmlns:a16="http://schemas.microsoft.com/office/drawing/2014/main" id="{3B45EF57-A1FB-46DB-8827-38AD7363C284}"/>
+              </a:ext>
+            </a:extLst>
+          </p:cNvPr>
+          <p:cNvPicPr>
+            <a:picLocks noChangeAspect="1"/>
+          </p:cNvPicPr>
           <p:nvPr/>
         </p:nvPicPr>
         <p:blipFill>
-          <a:blip r:embed="rId3"/>
+          <a:blip r:embed="rId3">
+            <a:extLst>
+              <a:ext uri="{28A0092B-C50C-407E-A947-70E740481C1C}">
+                <a14:useLocalDpi xmlns:a14="http://schemas.microsoft.com/office/drawing/2010/main" val="0"/>
+              </a:ext>
+            </a:extLst>
+          </a:blip>
           <a:stretch>
             <a:fillRect/>
           </a:stretch>
         </p:blipFill>
         <p:spPr>
           <a:xfrm>
-            <a:off x="795915" y="1447800"/>
-            <a:ext cx="6018353" cy="5168468"/>
+            <a:off x="2129022" y="780500"/>
+            <a:ext cx="8117336" cy="6077500"/>
           </a:xfrm>
           <a:prstGeom prst="rect">
             <a:avLst/>

--- a/Документация/Седых Владислав БД-22-1.pptx
+++ b/Документация/Седых Владислав БД-22-1.pptx
@@ -206,7 +206,7 @@
           <a:p>
             <a:fld id="{94389266-1B27-4525-B165-AD1A73342BE1}" type="datetimeFigureOut">
               <a:rPr lang="en-US" smtClean="0"/>
-              <a:t>6/7/2026</a:t>
+              <a:t>6/8/2026</a:t>
             </a:fld>
             <a:endParaRPr lang="en-US"/>
           </a:p>
@@ -2438,7 +2438,7 @@
           <a:p>
             <a:fld id="{DEA76DA3-B598-4B8A-8255-3391DDF783A7}" type="datetimeFigureOut">
               <a:rPr lang="ru-RU" smtClean="0"/>
-              <a:t>07.06.2026</a:t>
+              <a:t>08.06.2026</a:t>
             </a:fld>
             <a:endParaRPr lang="ru-RU"/>
           </a:p>
@@ -2636,7 +2636,7 @@
           <a:p>
             <a:fld id="{DEA76DA3-B598-4B8A-8255-3391DDF783A7}" type="datetimeFigureOut">
               <a:rPr lang="ru-RU" smtClean="0"/>
-              <a:t>07.06.2026</a:t>
+              <a:t>08.06.2026</a:t>
             </a:fld>
             <a:endParaRPr lang="ru-RU"/>
           </a:p>
@@ -2844,7 +2844,7 @@
           <a:p>
             <a:fld id="{DEA76DA3-B598-4B8A-8255-3391DDF783A7}" type="datetimeFigureOut">
               <a:rPr lang="ru-RU" smtClean="0"/>
-              <a:t>07.06.2026</a:t>
+              <a:t>08.06.2026</a:t>
             </a:fld>
             <a:endParaRPr lang="ru-RU"/>
           </a:p>
@@ -2951,7 +2951,7 @@
           <a:p>
             <a:fld id="{F93A723B-5719-4EEA-B777-EAF3DA7FDF21}" type="datetimeFigureOut">
               <a:rPr lang="ru-RU" smtClean="0"/>
-              <a:t>07.06.2026</a:t>
+              <a:t>08.06.2026</a:t>
             </a:fld>
             <a:endParaRPr lang="ru-RU"/>
           </a:p>
@@ -3217,7 +3217,7 @@
           <a:p>
             <a:fld id="{DEA76DA3-B598-4B8A-8255-3391DDF783A7}" type="datetimeFigureOut">
               <a:rPr lang="ru-RU" smtClean="0"/>
-              <a:t>07.06.2026</a:t>
+              <a:t>08.06.2026</a:t>
             </a:fld>
             <a:endParaRPr lang="ru-RU"/>
           </a:p>
@@ -3492,7 +3492,7 @@
           <a:p>
             <a:fld id="{DEA76DA3-B598-4B8A-8255-3391DDF783A7}" type="datetimeFigureOut">
               <a:rPr lang="ru-RU" smtClean="0"/>
-              <a:t>07.06.2026</a:t>
+              <a:t>08.06.2026</a:t>
             </a:fld>
             <a:endParaRPr lang="ru-RU"/>
           </a:p>
@@ -3757,7 +3757,7 @@
           <a:p>
             <a:fld id="{DEA76DA3-B598-4B8A-8255-3391DDF783A7}" type="datetimeFigureOut">
               <a:rPr lang="ru-RU" smtClean="0"/>
-              <a:t>07.06.2026</a:t>
+              <a:t>08.06.2026</a:t>
             </a:fld>
             <a:endParaRPr lang="ru-RU"/>
           </a:p>
@@ -4169,7 +4169,7 @@
           <a:p>
             <a:fld id="{DEA76DA3-B598-4B8A-8255-3391DDF783A7}" type="datetimeFigureOut">
               <a:rPr lang="ru-RU" smtClean="0"/>
-              <a:t>07.06.2026</a:t>
+              <a:t>08.06.2026</a:t>
             </a:fld>
             <a:endParaRPr lang="ru-RU"/>
           </a:p>
@@ -4310,7 +4310,7 @@
           <a:p>
             <a:fld id="{DEA76DA3-B598-4B8A-8255-3391DDF783A7}" type="datetimeFigureOut">
               <a:rPr lang="ru-RU" smtClean="0"/>
-              <a:t>07.06.2026</a:t>
+              <a:t>08.06.2026</a:t>
             </a:fld>
             <a:endParaRPr lang="ru-RU"/>
           </a:p>
@@ -4423,7 +4423,7 @@
           <a:p>
             <a:fld id="{DEA76DA3-B598-4B8A-8255-3391DDF783A7}" type="datetimeFigureOut">
               <a:rPr lang="ru-RU" smtClean="0"/>
-              <a:t>07.06.2026</a:t>
+              <a:t>08.06.2026</a:t>
             </a:fld>
             <a:endParaRPr lang="ru-RU"/>
           </a:p>
@@ -4734,7 +4734,7 @@
           <a:p>
             <a:fld id="{DEA76DA3-B598-4B8A-8255-3391DDF783A7}" type="datetimeFigureOut">
               <a:rPr lang="ru-RU" smtClean="0"/>
-              <a:t>07.06.2026</a:t>
+              <a:t>08.06.2026</a:t>
             </a:fld>
             <a:endParaRPr lang="ru-RU"/>
           </a:p>
@@ -5022,7 +5022,7 @@
           <a:p>
             <a:fld id="{DEA76DA3-B598-4B8A-8255-3391DDF783A7}" type="datetimeFigureOut">
               <a:rPr lang="ru-RU" smtClean="0"/>
-              <a:t>07.06.2026</a:t>
+              <a:t>08.06.2026</a:t>
             </a:fld>
             <a:endParaRPr lang="ru-RU"/>
           </a:p>
@@ -5263,7 +5263,7 @@
           <a:p>
             <a:fld id="{DEA76DA3-B598-4B8A-8255-3391DDF783A7}" type="datetimeFigureOut">
               <a:rPr lang="ru-RU" smtClean="0"/>
-              <a:t>07.06.2026</a:t>
+              <a:t>08.06.2026</a:t>
             </a:fld>
             <a:endParaRPr lang="ru-RU"/>
           </a:p>
@@ -10604,8 +10604,8 @@
         </p:nvSpPr>
         <p:spPr>
           <a:xfrm>
-            <a:off x="2627285" y="177119"/>
-            <a:ext cx="7189575" cy="1143000"/>
+            <a:off x="2603431" y="0"/>
+            <a:ext cx="7189575" cy="602109"/>
           </a:xfrm>
         </p:spPr>
         <p:txBody>
@@ -10684,7 +10684,7 @@
         </p:nvSpPr>
         <p:spPr>
           <a:xfrm>
-            <a:off x="4383480" y="1203552"/>
+            <a:off x="4383480" y="402054"/>
             <a:ext cx="3425040" cy="400110"/>
           </a:xfrm>
           <a:prstGeom prst="rect">
@@ -10710,26 +10710,34 @@
       </p:sp>
       <p:pic>
         <p:nvPicPr>
-          <p:cNvPr id="15" name="Рисунок 14">
-            <a:extLst>
-              <a:ext uri="{FF2B5EF4-FFF2-40B4-BE49-F238E27FC236}">
-                <a16:creationId xmlns:a16="http://schemas.microsoft.com/office/drawing/2014/main" id="{D2BC43E9-EFE7-4DB4-A63E-41408B23EB70}"/>
-              </a:ext>
-            </a:extLst>
-          </p:cNvPr>
-          <p:cNvPicPr/>
+          <p:cNvPr id="3" name="Рисунок 2">
+            <a:extLst>
+              <a:ext uri="{FF2B5EF4-FFF2-40B4-BE49-F238E27FC236}">
+                <a16:creationId xmlns:a16="http://schemas.microsoft.com/office/drawing/2014/main" id="{A521E629-12DB-4637-9499-B4EC9E6D2BCB}"/>
+              </a:ext>
+            </a:extLst>
+          </p:cNvPr>
+          <p:cNvPicPr>
+            <a:picLocks noChangeAspect="1"/>
+          </p:cNvPicPr>
           <p:nvPr/>
         </p:nvPicPr>
         <p:blipFill>
-          <a:blip r:embed="rId3"/>
+          <a:blip r:embed="rId3">
+            <a:extLst>
+              <a:ext uri="{28A0092B-C50C-407E-A947-70E740481C1C}">
+                <a14:useLocalDpi xmlns:a14="http://schemas.microsoft.com/office/drawing/2010/main" val="0"/>
+              </a:ext>
+            </a:extLst>
+          </a:blip>
           <a:stretch>
             <a:fillRect/>
           </a:stretch>
         </p:blipFill>
         <p:spPr>
           <a:xfrm>
-            <a:off x="2342482" y="1887206"/>
-            <a:ext cx="7507036" cy="4666454"/>
+            <a:off x="1665100" y="802164"/>
+            <a:ext cx="8861799" cy="6055836"/>
           </a:xfrm>
           <a:prstGeom prst="rect">
             <a:avLst/>

--- a/Документация/Седых Владислав БД-22-1.pptx
+++ b/Документация/Седых Владислав БД-22-1.pptx
@@ -206,7 +206,7 @@
           <a:p>
             <a:fld id="{94389266-1B27-4525-B165-AD1A73342BE1}" type="datetimeFigureOut">
               <a:rPr lang="en-US" smtClean="0"/>
-              <a:t>6/8/2026</a:t>
+              <a:t>6/23/2026</a:t>
             </a:fld>
             <a:endParaRPr lang="en-US"/>
           </a:p>
@@ -2438,7 +2438,7 @@
           <a:p>
             <a:fld id="{DEA76DA3-B598-4B8A-8255-3391DDF783A7}" type="datetimeFigureOut">
               <a:rPr lang="ru-RU" smtClean="0"/>
-              <a:t>08.06.2026</a:t>
+              <a:t>23.06.2026</a:t>
             </a:fld>
             <a:endParaRPr lang="ru-RU"/>
           </a:p>
@@ -2636,7 +2636,7 @@
           <a:p>
             <a:fld id="{DEA76DA3-B598-4B8A-8255-3391DDF783A7}" type="datetimeFigureOut">
               <a:rPr lang="ru-RU" smtClean="0"/>
-              <a:t>08.06.2026</a:t>
+              <a:t>23.06.2026</a:t>
             </a:fld>
             <a:endParaRPr lang="ru-RU"/>
           </a:p>
@@ -2844,7 +2844,7 @@
           <a:p>
             <a:fld id="{DEA76DA3-B598-4B8A-8255-3391DDF783A7}" type="datetimeFigureOut">
               <a:rPr lang="ru-RU" smtClean="0"/>
-              <a:t>08.06.2026</a:t>
+              <a:t>23.06.2026</a:t>
             </a:fld>
             <a:endParaRPr lang="ru-RU"/>
           </a:p>
@@ -2951,7 +2951,7 @@
           <a:p>
             <a:fld id="{F93A723B-5719-4EEA-B777-EAF3DA7FDF21}" type="datetimeFigureOut">
               <a:rPr lang="ru-RU" smtClean="0"/>
-              <a:t>08.06.2026</a:t>
+              <a:t>23.06.2026</a:t>
             </a:fld>
             <a:endParaRPr lang="ru-RU"/>
           </a:p>
@@ -3217,7 +3217,7 @@
           <a:p>
             <a:fld id="{DEA76DA3-B598-4B8A-8255-3391DDF783A7}" type="datetimeFigureOut">
               <a:rPr lang="ru-RU" smtClean="0"/>
-              <a:t>08.06.2026</a:t>
+              <a:t>23.06.2026</a:t>
             </a:fld>
             <a:endParaRPr lang="ru-RU"/>
           </a:p>
@@ -3492,7 +3492,7 @@
           <a:p>
             <a:fld id="{DEA76DA3-B598-4B8A-8255-3391DDF783A7}" type="datetimeFigureOut">
               <a:rPr lang="ru-RU" smtClean="0"/>
-              <a:t>08.06.2026</a:t>
+              <a:t>23.06.2026</a:t>
             </a:fld>
             <a:endParaRPr lang="ru-RU"/>
           </a:p>
@@ -3757,7 +3757,7 @@
           <a:p>
             <a:fld id="{DEA76DA3-B598-4B8A-8255-3391DDF783A7}" type="datetimeFigureOut">
               <a:rPr lang="ru-RU" smtClean="0"/>
-              <a:t>08.06.2026</a:t>
+              <a:t>23.06.2026</a:t>
             </a:fld>
             <a:endParaRPr lang="ru-RU"/>
           </a:p>
@@ -4169,7 +4169,7 @@
           <a:p>
             <a:fld id="{DEA76DA3-B598-4B8A-8255-3391DDF783A7}" type="datetimeFigureOut">
               <a:rPr lang="ru-RU" smtClean="0"/>
-              <a:t>08.06.2026</a:t>
+              <a:t>23.06.2026</a:t>
             </a:fld>
             <a:endParaRPr lang="ru-RU"/>
           </a:p>
@@ -4310,7 +4310,7 @@
           <a:p>
             <a:fld id="{DEA76DA3-B598-4B8A-8255-3391DDF783A7}" type="datetimeFigureOut">
               <a:rPr lang="ru-RU" smtClean="0"/>
-              <a:t>08.06.2026</a:t>
+              <a:t>23.06.2026</a:t>
             </a:fld>
             <a:endParaRPr lang="ru-RU"/>
           </a:p>
@@ -4423,7 +4423,7 @@
           <a:p>
             <a:fld id="{DEA76DA3-B598-4B8A-8255-3391DDF783A7}" type="datetimeFigureOut">
               <a:rPr lang="ru-RU" smtClean="0"/>
-              <a:t>08.06.2026</a:t>
+              <a:t>23.06.2026</a:t>
             </a:fld>
             <a:endParaRPr lang="ru-RU"/>
           </a:p>
@@ -4734,7 +4734,7 @@
           <a:p>
             <a:fld id="{DEA76DA3-B598-4B8A-8255-3391DDF783A7}" type="datetimeFigureOut">
               <a:rPr lang="ru-RU" smtClean="0"/>
-              <a:t>08.06.2026</a:t>
+              <a:t>23.06.2026</a:t>
             </a:fld>
             <a:endParaRPr lang="ru-RU"/>
           </a:p>
@@ -5022,7 +5022,7 @@
           <a:p>
             <a:fld id="{DEA76DA3-B598-4B8A-8255-3391DDF783A7}" type="datetimeFigureOut">
               <a:rPr lang="ru-RU" smtClean="0"/>
-              <a:t>08.06.2026</a:t>
+              <a:t>23.06.2026</a:t>
             </a:fld>
             <a:endParaRPr lang="ru-RU"/>
           </a:p>
@@ -5263,7 +5263,7 @@
           <a:p>
             <a:fld id="{DEA76DA3-B598-4B8A-8255-3391DDF783A7}" type="datetimeFigureOut">
               <a:rPr lang="ru-RU" smtClean="0"/>
-              <a:t>08.06.2026</a:t>
+              <a:t>23.06.2026</a:t>
             </a:fld>
             <a:endParaRPr lang="ru-RU"/>
           </a:p>
@@ -9031,7 +9031,7 @@
           <p:nvPr>
             <p:extLst>
               <p:ext uri="{D42A27DB-BD31-4B8C-83A1-F6EECF244321}">
-                <p14:modId xmlns:p14="http://schemas.microsoft.com/office/powerpoint/2010/main" val="4271566789"/>
+                <p14:modId xmlns:p14="http://schemas.microsoft.com/office/powerpoint/2010/main" val="963992071"/>
               </p:ext>
             </p:extLst>
           </p:nvPr>
@@ -9628,11 +9628,11 @@
                     <a:p>
                       <a:pPr algn="ctr"/>
                       <a:r>
-                        <a:rPr lang="en-US" dirty="0">
+                        <a:rPr lang="en-US" dirty="0" err="1">
                           <a:latin typeface="Arial" panose="020B0604020202020204" pitchFamily="34" charset="0"/>
                           <a:cs typeface="Arial" panose="020B0604020202020204" pitchFamily="34" charset="0"/>
                         </a:rPr>
-                        <a:t>Django test case</a:t>
+                        <a:t>pytest</a:t>
                       </a:r>
                       <a:endParaRPr lang="ru-RU" dirty="0">
                         <a:latin typeface="Arial" panose="020B0604020202020204" pitchFamily="34" charset="0"/>
@@ -10158,6 +10158,36 @@
               </a14:hiddenFill>
             </a:ext>
           </a:extLst>
+        </p:spPr>
+      </p:pic>
+      <p:pic>
+        <p:nvPicPr>
+          <p:cNvPr id="3" name="Рисунок 2">
+            <a:extLst>
+              <a:ext uri="{FF2B5EF4-FFF2-40B4-BE49-F238E27FC236}">
+                <a16:creationId xmlns:a16="http://schemas.microsoft.com/office/drawing/2014/main" id="{1CACEFC8-FD03-47FF-84D0-F06076F48EF3}"/>
+              </a:ext>
+            </a:extLst>
+          </p:cNvPr>
+          <p:cNvPicPr>
+            <a:picLocks noChangeAspect="1"/>
+          </p:cNvPicPr>
+          <p:nvPr/>
+        </p:nvPicPr>
+        <p:blipFill>
+          <a:blip r:embed="rId11"/>
+          <a:stretch>
+            <a:fillRect/>
+          </a:stretch>
+        </p:blipFill>
+        <p:spPr>
+          <a:xfrm>
+            <a:off x="5259703" y="6001555"/>
+            <a:ext cx="1672594" cy="564500"/>
+          </a:xfrm>
+          <a:prstGeom prst="rect">
+            <a:avLst/>
+          </a:prstGeom>
         </p:spPr>
       </p:pic>
     </p:spTree>
@@ -10208,8 +10238,8 @@
         </p:nvSpPr>
         <p:spPr>
           <a:xfrm>
-            <a:off x="1802675" y="223148"/>
-            <a:ext cx="8928586" cy="1143000"/>
+            <a:off x="1836965" y="63801"/>
+            <a:ext cx="8928586" cy="577478"/>
           </a:xfrm>
         </p:spPr>
         <p:txBody>
@@ -10248,7 +10278,7 @@
         </p:nvSpPr>
         <p:spPr>
           <a:xfrm>
-            <a:off x="1095160" y="1248389"/>
+            <a:off x="1054453" y="643798"/>
             <a:ext cx="4667436" cy="707886"/>
           </a:xfrm>
           <a:prstGeom prst="rect">
@@ -10338,113 +10368,19 @@
       </p:sp>
       <p:sp>
         <p:nvSpPr>
-          <p:cNvPr id="2" name="Прямоугольник 1">
-            <a:extLst>
-              <a:ext uri="{FF2B5EF4-FFF2-40B4-BE49-F238E27FC236}">
-                <a16:creationId xmlns:a16="http://schemas.microsoft.com/office/drawing/2014/main" id="{FCCEF899-1C04-4973-83E3-FF879F3C73EF}"/>
-              </a:ext>
-            </a:extLst>
-          </p:cNvPr>
-          <p:cNvSpPr/>
+          <p:cNvPr id="10" name="TextBox 9">
+            <a:extLst>
+              <a:ext uri="{FF2B5EF4-FFF2-40B4-BE49-F238E27FC236}">
+                <a16:creationId xmlns:a16="http://schemas.microsoft.com/office/drawing/2014/main" id="{2D5595D4-F499-48D9-89D6-2569A1ADA379}"/>
+              </a:ext>
+            </a:extLst>
+          </p:cNvPr>
+          <p:cNvSpPr txBox="1"/>
           <p:nvPr/>
         </p:nvSpPr>
         <p:spPr>
           <a:xfrm>
-            <a:off x="590788" y="1930852"/>
-            <a:ext cx="4896918" cy="3678760"/>
-          </a:xfrm>
-          <a:prstGeom prst="rect">
-            <a:avLst/>
-          </a:prstGeom>
-          <a:noFill/>
-        </p:spPr>
-        <p:style>
-          <a:lnRef idx="2">
-            <a:schemeClr val="accent1">
-              <a:shade val="50000"/>
-            </a:schemeClr>
-          </a:lnRef>
-          <a:fillRef idx="1">
-            <a:schemeClr val="accent1"/>
-          </a:fillRef>
-          <a:effectRef idx="0">
-            <a:schemeClr val="accent1"/>
-          </a:effectRef>
-          <a:fontRef idx="minor">
-            <a:schemeClr val="lt1"/>
-          </a:fontRef>
-        </p:style>
-        <p:txBody>
-          <a:bodyPr rtlCol="0" anchor="ctr"/>
-          <a:lstStyle/>
-          <a:p>
-            <a:pPr algn="ctr"/>
-            <a:endParaRPr lang="ru-RU"/>
-          </a:p>
-        </p:txBody>
-      </p:sp>
-      <p:sp>
-        <p:nvSpPr>
-          <p:cNvPr id="8" name="Прямоугольник 7">
-            <a:extLst>
-              <a:ext uri="{FF2B5EF4-FFF2-40B4-BE49-F238E27FC236}">
-                <a16:creationId xmlns:a16="http://schemas.microsoft.com/office/drawing/2014/main" id="{BEC69366-B880-41BC-B240-885F8248D7E6}"/>
-              </a:ext>
-            </a:extLst>
-          </p:cNvPr>
-          <p:cNvSpPr/>
-          <p:nvPr/>
-        </p:nvSpPr>
-        <p:spPr>
-          <a:xfrm>
-            <a:off x="6315968" y="1885131"/>
-            <a:ext cx="5285243" cy="4343123"/>
-          </a:xfrm>
-          <a:prstGeom prst="rect">
-            <a:avLst/>
-          </a:prstGeom>
-          <a:noFill/>
-        </p:spPr>
-        <p:style>
-          <a:lnRef idx="2">
-            <a:schemeClr val="accent1">
-              <a:shade val="50000"/>
-            </a:schemeClr>
-          </a:lnRef>
-          <a:fillRef idx="1">
-            <a:schemeClr val="accent1"/>
-          </a:fillRef>
-          <a:effectRef idx="0">
-            <a:schemeClr val="accent1"/>
-          </a:effectRef>
-          <a:fontRef idx="minor">
-            <a:schemeClr val="lt1"/>
-          </a:fontRef>
-        </p:style>
-        <p:txBody>
-          <a:bodyPr rtlCol="0" anchor="ctr"/>
-          <a:lstStyle/>
-          <a:p>
-            <a:pPr algn="ctr"/>
-            <a:endParaRPr lang="ru-RU"/>
-          </a:p>
-        </p:txBody>
-      </p:sp>
-      <p:sp>
-        <p:nvSpPr>
-          <p:cNvPr id="10" name="TextBox 9">
-            <a:extLst>
-              <a:ext uri="{FF2B5EF4-FFF2-40B4-BE49-F238E27FC236}">
-                <a16:creationId xmlns:a16="http://schemas.microsoft.com/office/drawing/2014/main" id="{2D5595D4-F499-48D9-89D6-2569A1ADA379}"/>
-              </a:ext>
-            </a:extLst>
-          </p:cNvPr>
-          <p:cNvSpPr txBox="1"/>
-          <p:nvPr/>
-        </p:nvSpPr>
-        <p:spPr>
-          <a:xfrm>
-            <a:off x="6470111" y="1248389"/>
+            <a:off x="6470111" y="641279"/>
             <a:ext cx="4667436" cy="707886"/>
           </a:xfrm>
           <a:prstGeom prst="rect">
@@ -10490,10 +10426,10 @@
       </p:sp>
       <p:pic>
         <p:nvPicPr>
-          <p:cNvPr id="12" name="Рисунок 11">
-            <a:extLst>
-              <a:ext uri="{FF2B5EF4-FFF2-40B4-BE49-F238E27FC236}">
-                <a16:creationId xmlns:a16="http://schemas.microsoft.com/office/drawing/2014/main" id="{4002A685-951C-4EEC-AA13-6BC79A118CC8}"/>
+          <p:cNvPr id="11" name="Рисунок 10">
+            <a:extLst>
+              <a:ext uri="{FF2B5EF4-FFF2-40B4-BE49-F238E27FC236}">
+                <a16:creationId xmlns:a16="http://schemas.microsoft.com/office/drawing/2014/main" id="{E60296DC-48ED-47FB-9B3E-9DEB7CC02B80}"/>
               </a:ext>
             </a:extLst>
           </p:cNvPr>
@@ -10508,8 +10444,8 @@
         </p:blipFill>
         <p:spPr>
           <a:xfrm>
-            <a:off x="590788" y="1930851"/>
-            <a:ext cx="4896918" cy="3678760"/>
+            <a:off x="125735" y="1519806"/>
+            <a:ext cx="5596154" cy="4768850"/>
           </a:xfrm>
           <a:prstGeom prst="rect">
             <a:avLst/>
@@ -10524,10 +10460,10 @@
       </p:pic>
       <p:pic>
         <p:nvPicPr>
-          <p:cNvPr id="13" name="Рисунок 12">
-            <a:extLst>
-              <a:ext uri="{FF2B5EF4-FFF2-40B4-BE49-F238E27FC236}">
-                <a16:creationId xmlns:a16="http://schemas.microsoft.com/office/drawing/2014/main" id="{A4FCCBFC-552D-46F9-A3CE-2EC2418B747C}"/>
+          <p:cNvPr id="14" name="Рисунок 13">
+            <a:extLst>
+              <a:ext uri="{FF2B5EF4-FFF2-40B4-BE49-F238E27FC236}">
+                <a16:creationId xmlns:a16="http://schemas.microsoft.com/office/drawing/2014/main" id="{5336E144-E6B9-4B82-8935-FCE435C77CA7}"/>
               </a:ext>
             </a:extLst>
           </p:cNvPr>
@@ -10542,7 +10478,7 @@
         </p:blipFill>
         <p:spPr>
           <a:xfrm>
-            <a:off x="5762596" y="1885131"/>
+            <a:off x="5786828" y="1519806"/>
             <a:ext cx="6299835" cy="4768850"/>
           </a:xfrm>
           <a:prstGeom prst="rect">
@@ -11087,10 +11023,10 @@
       </p:sp>
       <p:pic>
         <p:nvPicPr>
-          <p:cNvPr id="5" name="Рисунок 4">
-            <a:extLst>
-              <a:ext uri="{FF2B5EF4-FFF2-40B4-BE49-F238E27FC236}">
-                <a16:creationId xmlns:a16="http://schemas.microsoft.com/office/drawing/2014/main" id="{E1FD1233-C968-4053-9FC6-A98FC036E04C}"/>
+          <p:cNvPr id="2" name="Рисунок 1">
+            <a:extLst>
+              <a:ext uri="{FF2B5EF4-FFF2-40B4-BE49-F238E27FC236}">
+                <a16:creationId xmlns:a16="http://schemas.microsoft.com/office/drawing/2014/main" id="{E9D3B045-DCC9-41C1-93B9-20816DE2E6C8}"/>
               </a:ext>
             </a:extLst>
           </p:cNvPr>
@@ -11100,21 +11036,15 @@
           <p:nvPr/>
         </p:nvPicPr>
         <p:blipFill>
-          <a:blip r:embed="rId3">
-            <a:extLst>
-              <a:ext uri="{28A0092B-C50C-407E-A947-70E740481C1C}">
-                <a14:useLocalDpi xmlns:a14="http://schemas.microsoft.com/office/drawing/2010/main" val="0"/>
-              </a:ext>
-            </a:extLst>
-          </a:blip>
+          <a:blip r:embed="rId3"/>
           <a:stretch>
             <a:fillRect/>
           </a:stretch>
         </p:blipFill>
         <p:spPr>
           <a:xfrm>
-            <a:off x="672348" y="933558"/>
-            <a:ext cx="4740227" cy="2557321"/>
+            <a:off x="523342" y="907064"/>
+            <a:ext cx="4747510" cy="2555256"/>
           </a:xfrm>
           <a:prstGeom prst="rect">
             <a:avLst/>
@@ -11128,10 +11058,10 @@
       </p:pic>
       <p:pic>
         <p:nvPicPr>
-          <p:cNvPr id="9" name="Рисунок 8">
-            <a:extLst>
-              <a:ext uri="{FF2B5EF4-FFF2-40B4-BE49-F238E27FC236}">
-                <a16:creationId xmlns:a16="http://schemas.microsoft.com/office/drawing/2014/main" id="{B4927D14-36E0-4A1C-B515-09C1B893B471}"/>
+          <p:cNvPr id="3" name="Рисунок 2">
+            <a:extLst>
+              <a:ext uri="{FF2B5EF4-FFF2-40B4-BE49-F238E27FC236}">
+                <a16:creationId xmlns:a16="http://schemas.microsoft.com/office/drawing/2014/main" id="{0B0CEC5D-CAF6-42AB-97EA-05F0AA9A3FF1}"/>
               </a:ext>
             </a:extLst>
           </p:cNvPr>
@@ -11141,21 +11071,15 @@
           <p:nvPr/>
         </p:nvPicPr>
         <p:blipFill>
-          <a:blip r:embed="rId4">
-            <a:extLst>
-              <a:ext uri="{28A0092B-C50C-407E-A947-70E740481C1C}">
-                <a14:useLocalDpi xmlns:a14="http://schemas.microsoft.com/office/drawing/2010/main" val="0"/>
-              </a:ext>
-            </a:extLst>
-          </a:blip>
+          <a:blip r:embed="rId4"/>
           <a:stretch>
             <a:fillRect/>
           </a:stretch>
         </p:blipFill>
         <p:spPr>
           <a:xfrm>
-            <a:off x="672348" y="3548827"/>
-            <a:ext cx="5065171" cy="1442853"/>
+            <a:off x="472600" y="3525680"/>
+            <a:ext cx="5160069" cy="1588900"/>
           </a:xfrm>
           <a:prstGeom prst="rect">
             <a:avLst/>
@@ -11169,10 +11093,10 @@
       </p:pic>
       <p:pic>
         <p:nvPicPr>
-          <p:cNvPr id="6" name="Рисунок 5">
-            <a:extLst>
-              <a:ext uri="{FF2B5EF4-FFF2-40B4-BE49-F238E27FC236}">
-                <a16:creationId xmlns:a16="http://schemas.microsoft.com/office/drawing/2014/main" id="{0C1A250E-2C7E-464C-97FB-DF593E5C8321}"/>
+          <p:cNvPr id="8" name="Рисунок 7">
+            <a:extLst>
+              <a:ext uri="{FF2B5EF4-FFF2-40B4-BE49-F238E27FC236}">
+                <a16:creationId xmlns:a16="http://schemas.microsoft.com/office/drawing/2014/main" id="{D4EC75FA-0181-4EEA-9ED2-3B7DF59E3C33}"/>
               </a:ext>
             </a:extLst>
           </p:cNvPr>
@@ -11182,21 +11106,15 @@
           <p:nvPr/>
         </p:nvPicPr>
         <p:blipFill>
-          <a:blip r:embed="rId5">
-            <a:extLst>
-              <a:ext uri="{28A0092B-C50C-407E-A947-70E740481C1C}">
-                <a14:useLocalDpi xmlns:a14="http://schemas.microsoft.com/office/drawing/2010/main" val="0"/>
-              </a:ext>
-            </a:extLst>
-          </a:blip>
+          <a:blip r:embed="rId5"/>
           <a:stretch>
             <a:fillRect/>
           </a:stretch>
         </p:blipFill>
         <p:spPr>
           <a:xfrm>
-            <a:off x="5479679" y="947475"/>
-            <a:ext cx="5160069" cy="1912851"/>
+            <a:off x="5479013" y="907064"/>
+            <a:ext cx="5607288" cy="2074275"/>
           </a:xfrm>
           <a:prstGeom prst="rect">
             <a:avLst/>
@@ -11210,10 +11128,10 @@
       </p:pic>
       <p:pic>
         <p:nvPicPr>
-          <p:cNvPr id="10" name="Рисунок 9">
-            <a:extLst>
-              <a:ext uri="{FF2B5EF4-FFF2-40B4-BE49-F238E27FC236}">
-                <a16:creationId xmlns:a16="http://schemas.microsoft.com/office/drawing/2014/main" id="{27BC44AD-8DCC-4269-A841-B390D9C20324}"/>
+          <p:cNvPr id="11" name="Рисунок 10">
+            <a:extLst>
+              <a:ext uri="{FF2B5EF4-FFF2-40B4-BE49-F238E27FC236}">
+                <a16:creationId xmlns:a16="http://schemas.microsoft.com/office/drawing/2014/main" id="{3668DF83-A6B3-46CF-A3A7-6F69DCEBEB72}"/>
               </a:ext>
             </a:extLst>
           </p:cNvPr>
@@ -11223,21 +11141,15 @@
           <p:nvPr/>
         </p:nvPicPr>
         <p:blipFill>
-          <a:blip r:embed="rId6">
-            <a:extLst>
-              <a:ext uri="{28A0092B-C50C-407E-A947-70E740481C1C}">
-                <a14:useLocalDpi xmlns:a14="http://schemas.microsoft.com/office/drawing/2010/main" val="0"/>
-              </a:ext>
-            </a:extLst>
-          </a:blip>
+          <a:blip r:embed="rId6"/>
           <a:stretch>
             <a:fillRect/>
           </a:stretch>
         </p:blipFill>
         <p:spPr>
           <a:xfrm>
-            <a:off x="672348" y="5087049"/>
-            <a:ext cx="4598504" cy="1310948"/>
+            <a:off x="472600" y="5177940"/>
+            <a:ext cx="5262161" cy="1473090"/>
           </a:xfrm>
           <a:prstGeom prst="rect">
             <a:avLst/>
@@ -11251,10 +11163,10 @@
       </p:pic>
       <p:pic>
         <p:nvPicPr>
-          <p:cNvPr id="14" name="Рисунок 13">
-            <a:extLst>
-              <a:ext uri="{FF2B5EF4-FFF2-40B4-BE49-F238E27FC236}">
-                <a16:creationId xmlns:a16="http://schemas.microsoft.com/office/drawing/2014/main" id="{B38F67DE-A912-469F-B379-DCC0B22F1D14}"/>
+          <p:cNvPr id="12" name="Рисунок 11">
+            <a:extLst>
+              <a:ext uri="{FF2B5EF4-FFF2-40B4-BE49-F238E27FC236}">
+                <a16:creationId xmlns:a16="http://schemas.microsoft.com/office/drawing/2014/main" id="{B8F16398-028E-4BD6-8188-62AC024F5B02}"/>
               </a:ext>
             </a:extLst>
           </p:cNvPr>
@@ -11264,21 +11176,15 @@
           <p:nvPr/>
         </p:nvPicPr>
         <p:blipFill>
-          <a:blip r:embed="rId7">
-            <a:extLst>
-              <a:ext uri="{28A0092B-C50C-407E-A947-70E740481C1C}">
-                <a14:useLocalDpi xmlns:a14="http://schemas.microsoft.com/office/drawing/2010/main" val="0"/>
-              </a:ext>
-            </a:extLst>
-          </a:blip>
+          <a:blip r:embed="rId7"/>
           <a:stretch>
             <a:fillRect/>
           </a:stretch>
         </p:blipFill>
         <p:spPr>
           <a:xfrm>
-            <a:off x="5886979" y="2989223"/>
-            <a:ext cx="5199322" cy="1270945"/>
+            <a:off x="5713551" y="3016549"/>
+            <a:ext cx="5827828" cy="1336818"/>
           </a:xfrm>
           <a:prstGeom prst="rect">
             <a:avLst/>
@@ -11292,10 +11198,10 @@
       </p:pic>
       <p:pic>
         <p:nvPicPr>
-          <p:cNvPr id="16" name="Рисунок 15">
-            <a:extLst>
-              <a:ext uri="{FF2B5EF4-FFF2-40B4-BE49-F238E27FC236}">
-                <a16:creationId xmlns:a16="http://schemas.microsoft.com/office/drawing/2014/main" id="{7938B362-25A4-496F-A876-2E74C68B542D}"/>
+          <p:cNvPr id="13" name="Рисунок 12">
+            <a:extLst>
+              <a:ext uri="{FF2B5EF4-FFF2-40B4-BE49-F238E27FC236}">
+                <a16:creationId xmlns:a16="http://schemas.microsoft.com/office/drawing/2014/main" id="{7F1D6464-E9A5-410B-AF69-3620C39B860B}"/>
               </a:ext>
             </a:extLst>
           </p:cNvPr>
@@ -11305,25 +11211,24 @@
           <p:nvPr/>
         </p:nvPicPr>
         <p:blipFill>
-          <a:blip r:embed="rId8">
-            <a:extLst>
-              <a:ext uri="{28A0092B-C50C-407E-A947-70E740481C1C}">
-                <a14:useLocalDpi xmlns:a14="http://schemas.microsoft.com/office/drawing/2010/main" val="0"/>
-              </a:ext>
-            </a:extLst>
-          </a:blip>
+          <a:blip r:embed="rId8"/>
           <a:stretch>
             <a:fillRect/>
           </a:stretch>
         </p:blipFill>
         <p:spPr>
           <a:xfrm>
-            <a:off x="5824139" y="4389065"/>
-            <a:ext cx="5262161" cy="2299701"/>
+            <a:off x="5926231" y="4388577"/>
+            <a:ext cx="5160070" cy="2239423"/>
           </a:xfrm>
           <a:prstGeom prst="rect">
             <a:avLst/>
           </a:prstGeom>
+          <a:ln>
+            <a:solidFill>
+              <a:schemeClr val="tx1"/>
+            </a:solidFill>
+          </a:ln>
         </p:spPr>
       </p:pic>
     </p:spTree>
